--- a/lectures/L4.pptx
+++ b/lectures/L4.pptx
@@ -207,223 +207,6 @@
 <file path=ppt/changesInfos/changesInfo1.xml><?xml version="1.0" encoding="utf-8"?>
 <pc:chgInfo xmlns:a="http://schemas.openxmlformats.org/drawingml/2006/main" xmlns:r="http://schemas.openxmlformats.org/officeDocument/2006/relationships" xmlns:ac="http://schemas.microsoft.com/office/drawing/2013/main/command" xmlns:pc="http://schemas.microsoft.com/office/powerpoint/2013/main/command">
   <pc:docChgLst>
-    <pc:chgData name="Di Mattia Alessandro Edoardo Giorgio David" userId="f8954a66-e5ad-4a1c-9536-1d2117047f5f" providerId="ADAL" clId="{AC787D5D-10B8-4750-885F-805D7C9E9737}"/>
-    <pc:docChg chg="undo custSel addSld modSld">
-      <pc:chgData name="Di Mattia Alessandro Edoardo Giorgio David" userId="f8954a66-e5ad-4a1c-9536-1d2117047f5f" providerId="ADAL" clId="{AC787D5D-10B8-4750-885F-805D7C9E9737}" dt="2021-08-20T15:21:02.985" v="455" actId="20577"/>
-      <pc:docMkLst>
-        <pc:docMk/>
-      </pc:docMkLst>
-      <pc:sldChg chg="modSp new mod">
-        <pc:chgData name="Di Mattia Alessandro Edoardo Giorgio David" userId="f8954a66-e5ad-4a1c-9536-1d2117047f5f" providerId="ADAL" clId="{AC787D5D-10B8-4750-885F-805D7C9E9737}" dt="2021-08-20T14:45:37.819" v="298" actId="20577"/>
-        <pc:sldMkLst>
-          <pc:docMk/>
-          <pc:sldMk cId="3870998453" sldId="298"/>
-        </pc:sldMkLst>
-        <pc:spChg chg="mod">
-          <ac:chgData name="Di Mattia Alessandro Edoardo Giorgio David" userId="f8954a66-e5ad-4a1c-9536-1d2117047f5f" providerId="ADAL" clId="{AC787D5D-10B8-4750-885F-805D7C9E9737}" dt="2021-08-20T14:38:55.348" v="14" actId="122"/>
-          <ac:spMkLst>
-            <pc:docMk/>
-            <pc:sldMk cId="3870998453" sldId="298"/>
-            <ac:spMk id="2" creationId="{CC70B360-B3ED-43E5-A748-F5B5C403C878}"/>
-          </ac:spMkLst>
-        </pc:spChg>
-        <pc:spChg chg="mod">
-          <ac:chgData name="Di Mattia Alessandro Edoardo Giorgio David" userId="f8954a66-e5ad-4a1c-9536-1d2117047f5f" providerId="ADAL" clId="{AC787D5D-10B8-4750-885F-805D7C9E9737}" dt="2021-08-20T14:45:37.819" v="298" actId="20577"/>
-          <ac:spMkLst>
-            <pc:docMk/>
-            <pc:sldMk cId="3870998453" sldId="298"/>
-            <ac:spMk id="3" creationId="{7AB3AA8F-0BE3-46AB-A9D7-309F7F97E4C0}"/>
-          </ac:spMkLst>
-        </pc:spChg>
-      </pc:sldChg>
-      <pc:sldChg chg="addSp delSp modSp new mod modClrScheme chgLayout">
-        <pc:chgData name="Di Mattia Alessandro Edoardo Giorgio David" userId="f8954a66-e5ad-4a1c-9536-1d2117047f5f" providerId="ADAL" clId="{AC787D5D-10B8-4750-885F-805D7C9E9737}" dt="2021-08-20T14:46:06.034" v="304"/>
-        <pc:sldMkLst>
-          <pc:docMk/>
-          <pc:sldMk cId="316752284" sldId="299"/>
-        </pc:sldMkLst>
-        <pc:spChg chg="del">
-          <ac:chgData name="Di Mattia Alessandro Edoardo Giorgio David" userId="f8954a66-e5ad-4a1c-9536-1d2117047f5f" providerId="ADAL" clId="{AC787D5D-10B8-4750-885F-805D7C9E9737}" dt="2021-08-20T14:46:03.679" v="303" actId="700"/>
-          <ac:spMkLst>
-            <pc:docMk/>
-            <pc:sldMk cId="316752284" sldId="299"/>
-            <ac:spMk id="2" creationId="{D510B283-081F-43CE-96F6-08C288F3DFFB}"/>
-          </ac:spMkLst>
-        </pc:spChg>
-        <pc:spChg chg="del mod">
-          <ac:chgData name="Di Mattia Alessandro Edoardo Giorgio David" userId="f8954a66-e5ad-4a1c-9536-1d2117047f5f" providerId="ADAL" clId="{AC787D5D-10B8-4750-885F-805D7C9E9737}" dt="2021-08-20T14:46:03.679" v="303" actId="700"/>
-          <ac:spMkLst>
-            <pc:docMk/>
-            <pc:sldMk cId="316752284" sldId="299"/>
-            <ac:spMk id="3" creationId="{61373EFE-DB58-42AD-8DA9-E7D7FBC43DC0}"/>
-          </ac:spMkLst>
-        </pc:spChg>
-        <pc:picChg chg="add">
-          <ac:chgData name="Di Mattia Alessandro Edoardo Giorgio David" userId="f8954a66-e5ad-4a1c-9536-1d2117047f5f" providerId="ADAL" clId="{AC787D5D-10B8-4750-885F-805D7C9E9737}" dt="2021-08-20T14:46:06.034" v="304"/>
-          <ac:picMkLst>
-            <pc:docMk/>
-            <pc:sldMk cId="316752284" sldId="299"/>
-            <ac:picMk id="4" creationId="{34E6A750-E0B8-41C0-A1C7-288A84AD5D95}"/>
-          </ac:picMkLst>
-        </pc:picChg>
-      </pc:sldChg>
-      <pc:sldChg chg="addSp modSp new mod">
-        <pc:chgData name="Di Mattia Alessandro Edoardo Giorgio David" userId="f8954a66-e5ad-4a1c-9536-1d2117047f5f" providerId="ADAL" clId="{AC787D5D-10B8-4750-885F-805D7C9E9737}" dt="2021-08-20T14:51:41.672" v="307" actId="1076"/>
-        <pc:sldMkLst>
-          <pc:docMk/>
-          <pc:sldMk cId="3144966826" sldId="300"/>
-        </pc:sldMkLst>
-        <pc:picChg chg="add mod">
-          <ac:chgData name="Di Mattia Alessandro Edoardo Giorgio David" userId="f8954a66-e5ad-4a1c-9536-1d2117047f5f" providerId="ADAL" clId="{AC787D5D-10B8-4750-885F-805D7C9E9737}" dt="2021-08-20T14:51:41.672" v="307" actId="1076"/>
-          <ac:picMkLst>
-            <pc:docMk/>
-            <pc:sldMk cId="3144966826" sldId="300"/>
-            <ac:picMk id="2" creationId="{E613DE37-F2C5-40EB-9E94-3226883C95DB}"/>
-          </ac:picMkLst>
-        </pc:picChg>
-      </pc:sldChg>
-      <pc:sldChg chg="addSp modSp new mod modClrScheme chgLayout">
-        <pc:chgData name="Di Mattia Alessandro Edoardo Giorgio David" userId="f8954a66-e5ad-4a1c-9536-1d2117047f5f" providerId="ADAL" clId="{AC787D5D-10B8-4750-885F-805D7C9E9737}" dt="2021-08-20T15:09:51.424" v="406" actId="20577"/>
-        <pc:sldMkLst>
-          <pc:docMk/>
-          <pc:sldMk cId="941163814" sldId="301"/>
-        </pc:sldMkLst>
-        <pc:spChg chg="add mod">
-          <ac:chgData name="Di Mattia Alessandro Edoardo Giorgio David" userId="f8954a66-e5ad-4a1c-9536-1d2117047f5f" providerId="ADAL" clId="{AC787D5D-10B8-4750-885F-805D7C9E9737}" dt="2021-08-20T14:59:05.983" v="313" actId="122"/>
-          <ac:spMkLst>
-            <pc:docMk/>
-            <pc:sldMk cId="941163814" sldId="301"/>
-            <ac:spMk id="2" creationId="{03192228-75B4-4CBA-B91B-AFD69837867A}"/>
-          </ac:spMkLst>
-        </pc:spChg>
-        <pc:spChg chg="add mod">
-          <ac:chgData name="Di Mattia Alessandro Edoardo Giorgio David" userId="f8954a66-e5ad-4a1c-9536-1d2117047f5f" providerId="ADAL" clId="{AC787D5D-10B8-4750-885F-805D7C9E9737}" dt="2021-08-20T15:09:51.424" v="406" actId="20577"/>
-          <ac:spMkLst>
-            <pc:docMk/>
-            <pc:sldMk cId="941163814" sldId="301"/>
-            <ac:spMk id="3" creationId="{A954FACC-FED0-4D82-87FB-6B26DCE06EC6}"/>
-          </ac:spMkLst>
-        </pc:spChg>
-      </pc:sldChg>
-      <pc:sldChg chg="addSp delSp modSp new mod">
-        <pc:chgData name="Di Mattia Alessandro Edoardo Giorgio David" userId="f8954a66-e5ad-4a1c-9536-1d2117047f5f" providerId="ADAL" clId="{AC787D5D-10B8-4750-885F-805D7C9E9737}" dt="2021-08-20T15:00:15.602" v="322" actId="14100"/>
-        <pc:sldMkLst>
-          <pc:docMk/>
-          <pc:sldMk cId="1062955294" sldId="302"/>
-        </pc:sldMkLst>
-        <pc:spChg chg="mod">
-          <ac:chgData name="Di Mattia Alessandro Edoardo Giorgio David" userId="f8954a66-e5ad-4a1c-9536-1d2117047f5f" providerId="ADAL" clId="{AC787D5D-10B8-4750-885F-805D7C9E9737}" dt="2021-08-20T15:00:08.576" v="321" actId="122"/>
-          <ac:spMkLst>
-            <pc:docMk/>
-            <pc:sldMk cId="1062955294" sldId="302"/>
-            <ac:spMk id="2" creationId="{25EF509A-071D-411C-A0B0-D4208223146E}"/>
-          </ac:spMkLst>
-        </pc:spChg>
-        <pc:spChg chg="del">
-          <ac:chgData name="Di Mattia Alessandro Edoardo Giorgio David" userId="f8954a66-e5ad-4a1c-9536-1d2117047f5f" providerId="ADAL" clId="{AC787D5D-10B8-4750-885F-805D7C9E9737}" dt="2021-08-20T14:59:42.063" v="318"/>
-          <ac:spMkLst>
-            <pc:docMk/>
-            <pc:sldMk cId="1062955294" sldId="302"/>
-            <ac:spMk id="3" creationId="{BE19CB99-A33A-4A01-9905-9D0C3914D9D2}"/>
-          </ac:spMkLst>
-        </pc:spChg>
-        <pc:picChg chg="add mod">
-          <ac:chgData name="Di Mattia Alessandro Edoardo Giorgio David" userId="f8954a66-e5ad-4a1c-9536-1d2117047f5f" providerId="ADAL" clId="{AC787D5D-10B8-4750-885F-805D7C9E9737}" dt="2021-08-20T15:00:15.602" v="322" actId="14100"/>
-          <ac:picMkLst>
-            <pc:docMk/>
-            <pc:sldMk cId="1062955294" sldId="302"/>
-            <ac:picMk id="4" creationId="{5ED3C2D6-63C5-460B-A836-842FEB2B0177}"/>
-          </ac:picMkLst>
-        </pc:picChg>
-      </pc:sldChg>
-      <pc:sldChg chg="modSp new mod">
-        <pc:chgData name="Di Mattia Alessandro Edoardo Giorgio David" userId="f8954a66-e5ad-4a1c-9536-1d2117047f5f" providerId="ADAL" clId="{AC787D5D-10B8-4750-885F-805D7C9E9737}" dt="2021-08-20T15:09:36.335" v="398" actId="14"/>
-        <pc:sldMkLst>
-          <pc:docMk/>
-          <pc:sldMk cId="2044962240" sldId="303"/>
-        </pc:sldMkLst>
-        <pc:spChg chg="mod">
-          <ac:chgData name="Di Mattia Alessandro Edoardo Giorgio David" userId="f8954a66-e5ad-4a1c-9536-1d2117047f5f" providerId="ADAL" clId="{AC787D5D-10B8-4750-885F-805D7C9E9737}" dt="2021-08-20T15:00:32.711" v="325" actId="122"/>
-          <ac:spMkLst>
-            <pc:docMk/>
-            <pc:sldMk cId="2044962240" sldId="303"/>
-            <ac:spMk id="2" creationId="{29243411-1081-421F-B743-6D9D5E11545B}"/>
-          </ac:spMkLst>
-        </pc:spChg>
-        <pc:spChg chg="mod">
-          <ac:chgData name="Di Mattia Alessandro Edoardo Giorgio David" userId="f8954a66-e5ad-4a1c-9536-1d2117047f5f" providerId="ADAL" clId="{AC787D5D-10B8-4750-885F-805D7C9E9737}" dt="2021-08-20T15:09:36.335" v="398" actId="14"/>
-          <ac:spMkLst>
-            <pc:docMk/>
-            <pc:sldMk cId="2044962240" sldId="303"/>
-            <ac:spMk id="3" creationId="{2A3AA81C-414F-4D7B-9C0E-C805FF24F569}"/>
-          </ac:spMkLst>
-        </pc:spChg>
-      </pc:sldChg>
-      <pc:sldChg chg="addSp delSp modSp new mod">
-        <pc:chgData name="Di Mattia Alessandro Edoardo Giorgio David" userId="f8954a66-e5ad-4a1c-9536-1d2117047f5f" providerId="ADAL" clId="{AC787D5D-10B8-4750-885F-805D7C9E9737}" dt="2021-08-20T15:12:13.433" v="412"/>
-        <pc:sldMkLst>
-          <pc:docMk/>
-          <pc:sldMk cId="3567292898" sldId="304"/>
-        </pc:sldMkLst>
-        <pc:spChg chg="mod">
-          <ac:chgData name="Di Mattia Alessandro Edoardo Giorgio David" userId="f8954a66-e5ad-4a1c-9536-1d2117047f5f" providerId="ADAL" clId="{AC787D5D-10B8-4750-885F-805D7C9E9737}" dt="2021-08-20T15:10:13.213" v="409" actId="122"/>
-          <ac:spMkLst>
-            <pc:docMk/>
-            <pc:sldMk cId="3567292898" sldId="304"/>
-            <ac:spMk id="2" creationId="{B9A891B8-FCF3-4D10-8095-90B579A3DB40}"/>
-          </ac:spMkLst>
-        </pc:spChg>
-        <pc:spChg chg="add del">
-          <ac:chgData name="Di Mattia Alessandro Edoardo Giorgio David" userId="f8954a66-e5ad-4a1c-9536-1d2117047f5f" providerId="ADAL" clId="{AC787D5D-10B8-4750-885F-805D7C9E9737}" dt="2021-08-20T15:12:13.433" v="412"/>
-          <ac:spMkLst>
-            <pc:docMk/>
-            <pc:sldMk cId="3567292898" sldId="304"/>
-            <ac:spMk id="3" creationId="{DB645B7F-AD3D-4CAA-AD5D-BE21722A27B2}"/>
-          </ac:spMkLst>
-        </pc:spChg>
-        <pc:picChg chg="add del mod">
-          <ac:chgData name="Di Mattia Alessandro Edoardo Giorgio David" userId="f8954a66-e5ad-4a1c-9536-1d2117047f5f" providerId="ADAL" clId="{AC787D5D-10B8-4750-885F-805D7C9E9737}" dt="2021-08-20T15:11:48.619" v="411"/>
-          <ac:picMkLst>
-            <pc:docMk/>
-            <pc:sldMk cId="3567292898" sldId="304"/>
-            <ac:picMk id="4" creationId="{A0D49A57-9517-4AB9-A940-65FDCC83E125}"/>
-          </ac:picMkLst>
-        </pc:picChg>
-        <pc:picChg chg="add mod">
-          <ac:chgData name="Di Mattia Alessandro Edoardo Giorgio David" userId="f8954a66-e5ad-4a1c-9536-1d2117047f5f" providerId="ADAL" clId="{AC787D5D-10B8-4750-885F-805D7C9E9737}" dt="2021-08-20T15:12:13.433" v="412"/>
-          <ac:picMkLst>
-            <pc:docMk/>
-            <pc:sldMk cId="3567292898" sldId="304"/>
-            <ac:picMk id="5" creationId="{4596526A-0688-4381-B13F-22A6737478DA}"/>
-          </ac:picMkLst>
-        </pc:picChg>
-      </pc:sldChg>
-      <pc:sldChg chg="modSp new mod">
-        <pc:chgData name="Di Mattia Alessandro Edoardo Giorgio David" userId="f8954a66-e5ad-4a1c-9536-1d2117047f5f" providerId="ADAL" clId="{AC787D5D-10B8-4750-885F-805D7C9E9737}" dt="2021-08-20T15:21:02.985" v="455" actId="20577"/>
-        <pc:sldMkLst>
-          <pc:docMk/>
-          <pc:sldMk cId="2754829911" sldId="305"/>
-        </pc:sldMkLst>
-        <pc:spChg chg="mod">
-          <ac:chgData name="Di Mattia Alessandro Edoardo Giorgio David" userId="f8954a66-e5ad-4a1c-9536-1d2117047f5f" providerId="ADAL" clId="{AC787D5D-10B8-4750-885F-805D7C9E9737}" dt="2021-08-20T15:16:02.926" v="427" actId="122"/>
-          <ac:spMkLst>
-            <pc:docMk/>
-            <pc:sldMk cId="2754829911" sldId="305"/>
-            <ac:spMk id="2" creationId="{11C634F8-0591-458A-96D5-622BD02845C3}"/>
-          </ac:spMkLst>
-        </pc:spChg>
-        <pc:spChg chg="mod">
-          <ac:chgData name="Di Mattia Alessandro Edoardo Giorgio David" userId="f8954a66-e5ad-4a1c-9536-1d2117047f5f" providerId="ADAL" clId="{AC787D5D-10B8-4750-885F-805D7C9E9737}" dt="2021-08-20T15:21:02.985" v="455" actId="20577"/>
-          <ac:spMkLst>
-            <pc:docMk/>
-            <pc:sldMk cId="2754829911" sldId="305"/>
-            <ac:spMk id="3" creationId="{D47B4779-A817-46F6-AAA3-146DBB18D8B5}"/>
-          </ac:spMkLst>
-        </pc:spChg>
-      </pc:sldChg>
-    </pc:docChg>
-  </pc:docChgLst>
-  <pc:docChgLst>
     <pc:chgData name="Di Mattia Alessandro Edoardo Giorgio David" userId="f8954a66-e5ad-4a1c-9536-1d2117047f5f" providerId="ADAL" clId="{CDD3A680-70A0-4B3B-95E5-5D6AACE401AF}"/>
     <pc:docChg chg="undo custSel addSld delSld modSld modMainMaster">
       <pc:chgData name="Di Mattia Alessandro Edoardo Giorgio David" userId="f8954a66-e5ad-4a1c-9536-1d2117047f5f" providerId="ADAL" clId="{CDD3A680-70A0-4B3B-95E5-5D6AACE401AF}" dt="2021-10-04T08:15:43.334" v="11952" actId="114"/>
@@ -2035,6 +1818,223 @@
           </pc:spChg>
         </pc:sldLayoutChg>
       </pc:sldMasterChg>
+    </pc:docChg>
+  </pc:docChgLst>
+  <pc:docChgLst>
+    <pc:chgData name="Di Mattia Alessandro Edoardo Giorgio David" userId="f8954a66-e5ad-4a1c-9536-1d2117047f5f" providerId="ADAL" clId="{AC787D5D-10B8-4750-885F-805D7C9E9737}"/>
+    <pc:docChg chg="undo custSel addSld modSld">
+      <pc:chgData name="Di Mattia Alessandro Edoardo Giorgio David" userId="f8954a66-e5ad-4a1c-9536-1d2117047f5f" providerId="ADAL" clId="{AC787D5D-10B8-4750-885F-805D7C9E9737}" dt="2021-08-20T15:21:02.985" v="455" actId="20577"/>
+      <pc:docMkLst>
+        <pc:docMk/>
+      </pc:docMkLst>
+      <pc:sldChg chg="modSp new mod">
+        <pc:chgData name="Di Mattia Alessandro Edoardo Giorgio David" userId="f8954a66-e5ad-4a1c-9536-1d2117047f5f" providerId="ADAL" clId="{AC787D5D-10B8-4750-885F-805D7C9E9737}" dt="2021-08-20T14:45:37.819" v="298" actId="20577"/>
+        <pc:sldMkLst>
+          <pc:docMk/>
+          <pc:sldMk cId="3870998453" sldId="298"/>
+        </pc:sldMkLst>
+        <pc:spChg chg="mod">
+          <ac:chgData name="Di Mattia Alessandro Edoardo Giorgio David" userId="f8954a66-e5ad-4a1c-9536-1d2117047f5f" providerId="ADAL" clId="{AC787D5D-10B8-4750-885F-805D7C9E9737}" dt="2021-08-20T14:38:55.348" v="14" actId="122"/>
+          <ac:spMkLst>
+            <pc:docMk/>
+            <pc:sldMk cId="3870998453" sldId="298"/>
+            <ac:spMk id="2" creationId="{CC70B360-B3ED-43E5-A748-F5B5C403C878}"/>
+          </ac:spMkLst>
+        </pc:spChg>
+        <pc:spChg chg="mod">
+          <ac:chgData name="Di Mattia Alessandro Edoardo Giorgio David" userId="f8954a66-e5ad-4a1c-9536-1d2117047f5f" providerId="ADAL" clId="{AC787D5D-10B8-4750-885F-805D7C9E9737}" dt="2021-08-20T14:45:37.819" v="298" actId="20577"/>
+          <ac:spMkLst>
+            <pc:docMk/>
+            <pc:sldMk cId="3870998453" sldId="298"/>
+            <ac:spMk id="3" creationId="{7AB3AA8F-0BE3-46AB-A9D7-309F7F97E4C0}"/>
+          </ac:spMkLst>
+        </pc:spChg>
+      </pc:sldChg>
+      <pc:sldChg chg="addSp delSp modSp new mod modClrScheme chgLayout">
+        <pc:chgData name="Di Mattia Alessandro Edoardo Giorgio David" userId="f8954a66-e5ad-4a1c-9536-1d2117047f5f" providerId="ADAL" clId="{AC787D5D-10B8-4750-885F-805D7C9E9737}" dt="2021-08-20T14:46:06.034" v="304"/>
+        <pc:sldMkLst>
+          <pc:docMk/>
+          <pc:sldMk cId="316752284" sldId="299"/>
+        </pc:sldMkLst>
+        <pc:spChg chg="del">
+          <ac:chgData name="Di Mattia Alessandro Edoardo Giorgio David" userId="f8954a66-e5ad-4a1c-9536-1d2117047f5f" providerId="ADAL" clId="{AC787D5D-10B8-4750-885F-805D7C9E9737}" dt="2021-08-20T14:46:03.679" v="303" actId="700"/>
+          <ac:spMkLst>
+            <pc:docMk/>
+            <pc:sldMk cId="316752284" sldId="299"/>
+            <ac:spMk id="2" creationId="{D510B283-081F-43CE-96F6-08C288F3DFFB}"/>
+          </ac:spMkLst>
+        </pc:spChg>
+        <pc:spChg chg="del mod">
+          <ac:chgData name="Di Mattia Alessandro Edoardo Giorgio David" userId="f8954a66-e5ad-4a1c-9536-1d2117047f5f" providerId="ADAL" clId="{AC787D5D-10B8-4750-885F-805D7C9E9737}" dt="2021-08-20T14:46:03.679" v="303" actId="700"/>
+          <ac:spMkLst>
+            <pc:docMk/>
+            <pc:sldMk cId="316752284" sldId="299"/>
+            <ac:spMk id="3" creationId="{61373EFE-DB58-42AD-8DA9-E7D7FBC43DC0}"/>
+          </ac:spMkLst>
+        </pc:spChg>
+        <pc:picChg chg="add">
+          <ac:chgData name="Di Mattia Alessandro Edoardo Giorgio David" userId="f8954a66-e5ad-4a1c-9536-1d2117047f5f" providerId="ADAL" clId="{AC787D5D-10B8-4750-885F-805D7C9E9737}" dt="2021-08-20T14:46:06.034" v="304"/>
+          <ac:picMkLst>
+            <pc:docMk/>
+            <pc:sldMk cId="316752284" sldId="299"/>
+            <ac:picMk id="4" creationId="{34E6A750-E0B8-41C0-A1C7-288A84AD5D95}"/>
+          </ac:picMkLst>
+        </pc:picChg>
+      </pc:sldChg>
+      <pc:sldChg chg="addSp modSp new mod">
+        <pc:chgData name="Di Mattia Alessandro Edoardo Giorgio David" userId="f8954a66-e5ad-4a1c-9536-1d2117047f5f" providerId="ADAL" clId="{AC787D5D-10B8-4750-885F-805D7C9E9737}" dt="2021-08-20T14:51:41.672" v="307" actId="1076"/>
+        <pc:sldMkLst>
+          <pc:docMk/>
+          <pc:sldMk cId="3144966826" sldId="300"/>
+        </pc:sldMkLst>
+        <pc:picChg chg="add mod">
+          <ac:chgData name="Di Mattia Alessandro Edoardo Giorgio David" userId="f8954a66-e5ad-4a1c-9536-1d2117047f5f" providerId="ADAL" clId="{AC787D5D-10B8-4750-885F-805D7C9E9737}" dt="2021-08-20T14:51:41.672" v="307" actId="1076"/>
+          <ac:picMkLst>
+            <pc:docMk/>
+            <pc:sldMk cId="3144966826" sldId="300"/>
+            <ac:picMk id="2" creationId="{E613DE37-F2C5-40EB-9E94-3226883C95DB}"/>
+          </ac:picMkLst>
+        </pc:picChg>
+      </pc:sldChg>
+      <pc:sldChg chg="addSp modSp new mod modClrScheme chgLayout">
+        <pc:chgData name="Di Mattia Alessandro Edoardo Giorgio David" userId="f8954a66-e5ad-4a1c-9536-1d2117047f5f" providerId="ADAL" clId="{AC787D5D-10B8-4750-885F-805D7C9E9737}" dt="2021-08-20T15:09:51.424" v="406" actId="20577"/>
+        <pc:sldMkLst>
+          <pc:docMk/>
+          <pc:sldMk cId="941163814" sldId="301"/>
+        </pc:sldMkLst>
+        <pc:spChg chg="add mod">
+          <ac:chgData name="Di Mattia Alessandro Edoardo Giorgio David" userId="f8954a66-e5ad-4a1c-9536-1d2117047f5f" providerId="ADAL" clId="{AC787D5D-10B8-4750-885F-805D7C9E9737}" dt="2021-08-20T14:59:05.983" v="313" actId="122"/>
+          <ac:spMkLst>
+            <pc:docMk/>
+            <pc:sldMk cId="941163814" sldId="301"/>
+            <ac:spMk id="2" creationId="{03192228-75B4-4CBA-B91B-AFD69837867A}"/>
+          </ac:spMkLst>
+        </pc:spChg>
+        <pc:spChg chg="add mod">
+          <ac:chgData name="Di Mattia Alessandro Edoardo Giorgio David" userId="f8954a66-e5ad-4a1c-9536-1d2117047f5f" providerId="ADAL" clId="{AC787D5D-10B8-4750-885F-805D7C9E9737}" dt="2021-08-20T15:09:51.424" v="406" actId="20577"/>
+          <ac:spMkLst>
+            <pc:docMk/>
+            <pc:sldMk cId="941163814" sldId="301"/>
+            <ac:spMk id="3" creationId="{A954FACC-FED0-4D82-87FB-6B26DCE06EC6}"/>
+          </ac:spMkLst>
+        </pc:spChg>
+      </pc:sldChg>
+      <pc:sldChg chg="addSp delSp modSp new mod">
+        <pc:chgData name="Di Mattia Alessandro Edoardo Giorgio David" userId="f8954a66-e5ad-4a1c-9536-1d2117047f5f" providerId="ADAL" clId="{AC787D5D-10B8-4750-885F-805D7C9E9737}" dt="2021-08-20T15:00:15.602" v="322" actId="14100"/>
+        <pc:sldMkLst>
+          <pc:docMk/>
+          <pc:sldMk cId="1062955294" sldId="302"/>
+        </pc:sldMkLst>
+        <pc:spChg chg="mod">
+          <ac:chgData name="Di Mattia Alessandro Edoardo Giorgio David" userId="f8954a66-e5ad-4a1c-9536-1d2117047f5f" providerId="ADAL" clId="{AC787D5D-10B8-4750-885F-805D7C9E9737}" dt="2021-08-20T15:00:08.576" v="321" actId="122"/>
+          <ac:spMkLst>
+            <pc:docMk/>
+            <pc:sldMk cId="1062955294" sldId="302"/>
+            <ac:spMk id="2" creationId="{25EF509A-071D-411C-A0B0-D4208223146E}"/>
+          </ac:spMkLst>
+        </pc:spChg>
+        <pc:spChg chg="del">
+          <ac:chgData name="Di Mattia Alessandro Edoardo Giorgio David" userId="f8954a66-e5ad-4a1c-9536-1d2117047f5f" providerId="ADAL" clId="{AC787D5D-10B8-4750-885F-805D7C9E9737}" dt="2021-08-20T14:59:42.063" v="318"/>
+          <ac:spMkLst>
+            <pc:docMk/>
+            <pc:sldMk cId="1062955294" sldId="302"/>
+            <ac:spMk id="3" creationId="{BE19CB99-A33A-4A01-9905-9D0C3914D9D2}"/>
+          </ac:spMkLst>
+        </pc:spChg>
+        <pc:picChg chg="add mod">
+          <ac:chgData name="Di Mattia Alessandro Edoardo Giorgio David" userId="f8954a66-e5ad-4a1c-9536-1d2117047f5f" providerId="ADAL" clId="{AC787D5D-10B8-4750-885F-805D7C9E9737}" dt="2021-08-20T15:00:15.602" v="322" actId="14100"/>
+          <ac:picMkLst>
+            <pc:docMk/>
+            <pc:sldMk cId="1062955294" sldId="302"/>
+            <ac:picMk id="4" creationId="{5ED3C2D6-63C5-460B-A836-842FEB2B0177}"/>
+          </ac:picMkLst>
+        </pc:picChg>
+      </pc:sldChg>
+      <pc:sldChg chg="modSp new mod">
+        <pc:chgData name="Di Mattia Alessandro Edoardo Giorgio David" userId="f8954a66-e5ad-4a1c-9536-1d2117047f5f" providerId="ADAL" clId="{AC787D5D-10B8-4750-885F-805D7C9E9737}" dt="2021-08-20T15:09:36.335" v="398" actId="14"/>
+        <pc:sldMkLst>
+          <pc:docMk/>
+          <pc:sldMk cId="2044962240" sldId="303"/>
+        </pc:sldMkLst>
+        <pc:spChg chg="mod">
+          <ac:chgData name="Di Mattia Alessandro Edoardo Giorgio David" userId="f8954a66-e5ad-4a1c-9536-1d2117047f5f" providerId="ADAL" clId="{AC787D5D-10B8-4750-885F-805D7C9E9737}" dt="2021-08-20T15:00:32.711" v="325" actId="122"/>
+          <ac:spMkLst>
+            <pc:docMk/>
+            <pc:sldMk cId="2044962240" sldId="303"/>
+            <ac:spMk id="2" creationId="{29243411-1081-421F-B743-6D9D5E11545B}"/>
+          </ac:spMkLst>
+        </pc:spChg>
+        <pc:spChg chg="mod">
+          <ac:chgData name="Di Mattia Alessandro Edoardo Giorgio David" userId="f8954a66-e5ad-4a1c-9536-1d2117047f5f" providerId="ADAL" clId="{AC787D5D-10B8-4750-885F-805D7C9E9737}" dt="2021-08-20T15:09:36.335" v="398" actId="14"/>
+          <ac:spMkLst>
+            <pc:docMk/>
+            <pc:sldMk cId="2044962240" sldId="303"/>
+            <ac:spMk id="3" creationId="{2A3AA81C-414F-4D7B-9C0E-C805FF24F569}"/>
+          </ac:spMkLst>
+        </pc:spChg>
+      </pc:sldChg>
+      <pc:sldChg chg="addSp delSp modSp new mod">
+        <pc:chgData name="Di Mattia Alessandro Edoardo Giorgio David" userId="f8954a66-e5ad-4a1c-9536-1d2117047f5f" providerId="ADAL" clId="{AC787D5D-10B8-4750-885F-805D7C9E9737}" dt="2021-08-20T15:12:13.433" v="412"/>
+        <pc:sldMkLst>
+          <pc:docMk/>
+          <pc:sldMk cId="3567292898" sldId="304"/>
+        </pc:sldMkLst>
+        <pc:spChg chg="mod">
+          <ac:chgData name="Di Mattia Alessandro Edoardo Giorgio David" userId="f8954a66-e5ad-4a1c-9536-1d2117047f5f" providerId="ADAL" clId="{AC787D5D-10B8-4750-885F-805D7C9E9737}" dt="2021-08-20T15:10:13.213" v="409" actId="122"/>
+          <ac:spMkLst>
+            <pc:docMk/>
+            <pc:sldMk cId="3567292898" sldId="304"/>
+            <ac:spMk id="2" creationId="{B9A891B8-FCF3-4D10-8095-90B579A3DB40}"/>
+          </ac:spMkLst>
+        </pc:spChg>
+        <pc:spChg chg="add del">
+          <ac:chgData name="Di Mattia Alessandro Edoardo Giorgio David" userId="f8954a66-e5ad-4a1c-9536-1d2117047f5f" providerId="ADAL" clId="{AC787D5D-10B8-4750-885F-805D7C9E9737}" dt="2021-08-20T15:12:13.433" v="412"/>
+          <ac:spMkLst>
+            <pc:docMk/>
+            <pc:sldMk cId="3567292898" sldId="304"/>
+            <ac:spMk id="3" creationId="{DB645B7F-AD3D-4CAA-AD5D-BE21722A27B2}"/>
+          </ac:spMkLst>
+        </pc:spChg>
+        <pc:picChg chg="add del mod">
+          <ac:chgData name="Di Mattia Alessandro Edoardo Giorgio David" userId="f8954a66-e5ad-4a1c-9536-1d2117047f5f" providerId="ADAL" clId="{AC787D5D-10B8-4750-885F-805D7C9E9737}" dt="2021-08-20T15:11:48.619" v="411"/>
+          <ac:picMkLst>
+            <pc:docMk/>
+            <pc:sldMk cId="3567292898" sldId="304"/>
+            <ac:picMk id="4" creationId="{A0D49A57-9517-4AB9-A940-65FDCC83E125}"/>
+          </ac:picMkLst>
+        </pc:picChg>
+        <pc:picChg chg="add mod">
+          <ac:chgData name="Di Mattia Alessandro Edoardo Giorgio David" userId="f8954a66-e5ad-4a1c-9536-1d2117047f5f" providerId="ADAL" clId="{AC787D5D-10B8-4750-885F-805D7C9E9737}" dt="2021-08-20T15:12:13.433" v="412"/>
+          <ac:picMkLst>
+            <pc:docMk/>
+            <pc:sldMk cId="3567292898" sldId="304"/>
+            <ac:picMk id="5" creationId="{4596526A-0688-4381-B13F-22A6737478DA}"/>
+          </ac:picMkLst>
+        </pc:picChg>
+      </pc:sldChg>
+      <pc:sldChg chg="modSp new mod">
+        <pc:chgData name="Di Mattia Alessandro Edoardo Giorgio David" userId="f8954a66-e5ad-4a1c-9536-1d2117047f5f" providerId="ADAL" clId="{AC787D5D-10B8-4750-885F-805D7C9E9737}" dt="2021-08-20T15:21:02.985" v="455" actId="20577"/>
+        <pc:sldMkLst>
+          <pc:docMk/>
+          <pc:sldMk cId="2754829911" sldId="305"/>
+        </pc:sldMkLst>
+        <pc:spChg chg="mod">
+          <ac:chgData name="Di Mattia Alessandro Edoardo Giorgio David" userId="f8954a66-e5ad-4a1c-9536-1d2117047f5f" providerId="ADAL" clId="{AC787D5D-10B8-4750-885F-805D7C9E9737}" dt="2021-08-20T15:16:02.926" v="427" actId="122"/>
+          <ac:spMkLst>
+            <pc:docMk/>
+            <pc:sldMk cId="2754829911" sldId="305"/>
+            <ac:spMk id="2" creationId="{11C634F8-0591-458A-96D5-622BD02845C3}"/>
+          </ac:spMkLst>
+        </pc:spChg>
+        <pc:spChg chg="mod">
+          <ac:chgData name="Di Mattia Alessandro Edoardo Giorgio David" userId="f8954a66-e5ad-4a1c-9536-1d2117047f5f" providerId="ADAL" clId="{AC787D5D-10B8-4750-885F-805D7C9E9737}" dt="2021-08-20T15:21:02.985" v="455" actId="20577"/>
+          <ac:spMkLst>
+            <pc:docMk/>
+            <pc:sldMk cId="2754829911" sldId="305"/>
+            <ac:spMk id="3" creationId="{D47B4779-A817-46F6-AAA3-146DBB18D8B5}"/>
+          </ac:spMkLst>
+        </pc:spChg>
+      </pc:sldChg>
     </pc:docChg>
   </pc:docChgLst>
   <pc:docChgLst>
@@ -7929,7 +7929,7 @@
           <a:p>
             <a:fld id="{2A8A781A-1859-4C85-BF75-12C8100C455E}" type="datetimeFigureOut">
               <a:rPr lang="nb-NO" smtClean="0"/>
-              <a:t>04.10.2021</a:t>
+              <a:t>14.08.2026</a:t>
             </a:fld>
             <a:endParaRPr lang="nb-NO" dirty="0"/>
           </a:p>
@@ -8106,7 +8106,7 @@
           <a:p>
             <a:fld id="{8B442447-825E-F44A-AE66-BBD0FC2F1FF6}" type="datetimeFigureOut">
               <a:rPr lang="nb-NO" smtClean="0"/>
-              <a:t>04.10.2021</a:t>
+              <a:t>14.08.2026</a:t>
             </a:fld>
             <a:endParaRPr lang="nb-NO" dirty="0"/>
           </a:p>
@@ -8372,6 +8372,394 @@
     </a:lvl9pPr>
   </p:notesStyle>
 </p:notesMaster>
+</file>
+
+<file path=ppt/notesSlides/notesSlide1.xml><?xml version="1.0" encoding="utf-8"?>
+<p:notes xmlns:a="http://schemas.openxmlformats.org/drawingml/2006/main" xmlns:r="http://schemas.openxmlformats.org/officeDocument/2006/relationships" xmlns:p="http://schemas.openxmlformats.org/presentationml/2006/main">
+  <p:cSld>
+    <p:spTree>
+      <p:nvGrpSpPr>
+        <p:cNvPr id="1" name=""/>
+        <p:cNvGrpSpPr/>
+        <p:nvPr/>
+      </p:nvGrpSpPr>
+      <p:grpSpPr>
+        <a:xfrm>
+          <a:off x="0" y="0"/>
+          <a:ext cx="0" cy="0"/>
+          <a:chOff x="0" y="0"/>
+          <a:chExt cx="0" cy="0"/>
+        </a:xfrm>
+      </p:grpSpPr>
+      <p:sp>
+        <p:nvSpPr>
+          <p:cNvPr id="2" name="Slide Image Placeholder 1"/>
+          <p:cNvSpPr>
+            <a:spLocks noGrp="1" noRot="1" noChangeAspect="1"/>
+          </p:cNvSpPr>
+          <p:nvPr>
+            <p:ph type="sldImg"/>
+          </p:nvPr>
+        </p:nvSpPr>
+        <p:spPr/>
+      </p:sp>
+      <p:sp>
+        <p:nvSpPr>
+          <p:cNvPr id="3" name="Notes Placeholder 2"/>
+          <p:cNvSpPr>
+            <a:spLocks noGrp="1"/>
+          </p:cNvSpPr>
+          <p:nvPr>
+            <p:ph type="body" idx="1"/>
+          </p:nvPr>
+        </p:nvSpPr>
+        <p:spPr/>
+        <p:txBody>
+          <a:bodyPr/>
+          <a:lstStyle/>
+          <a:p>
+            <a:endParaRPr lang="en-US" dirty="0"/>
+          </a:p>
+        </p:txBody>
+      </p:sp>
+      <p:sp>
+        <p:nvSpPr>
+          <p:cNvPr id="4" name="Slide Number Placeholder 3"/>
+          <p:cNvSpPr>
+            <a:spLocks noGrp="1"/>
+          </p:cNvSpPr>
+          <p:nvPr>
+            <p:ph type="sldNum" sz="quarter" idx="5"/>
+          </p:nvPr>
+        </p:nvSpPr>
+        <p:spPr/>
+        <p:txBody>
+          <a:bodyPr/>
+          <a:lstStyle/>
+          <a:p>
+            <a:fld id="{BA7E51CF-144B-7241-A1FB-D978B63A9AA3}" type="slidenum">
+              <a:rPr lang="nb-NO" smtClean="0"/>
+              <a:t>5</a:t>
+            </a:fld>
+            <a:endParaRPr lang="nb-NO" dirty="0"/>
+          </a:p>
+        </p:txBody>
+      </p:sp>
+    </p:spTree>
+    <p:extLst>
+      <p:ext uri="{BB962C8B-B14F-4D97-AF65-F5344CB8AC3E}">
+        <p14:creationId xmlns:p14="http://schemas.microsoft.com/office/powerpoint/2010/main" val="1100231400"/>
+      </p:ext>
+    </p:extLst>
+  </p:cSld>
+  <p:clrMapOvr>
+    <a:masterClrMapping/>
+  </p:clrMapOvr>
+</p:notes>
+</file>
+
+<file path=ppt/notesSlides/notesSlide2.xml><?xml version="1.0" encoding="utf-8"?>
+<p:notes xmlns:a="http://schemas.openxmlformats.org/drawingml/2006/main" xmlns:r="http://schemas.openxmlformats.org/officeDocument/2006/relationships" xmlns:p="http://schemas.openxmlformats.org/presentationml/2006/main">
+  <p:cSld>
+    <p:spTree>
+      <p:nvGrpSpPr>
+        <p:cNvPr id="1" name=""/>
+        <p:cNvGrpSpPr/>
+        <p:nvPr/>
+      </p:nvGrpSpPr>
+      <p:grpSpPr>
+        <a:xfrm>
+          <a:off x="0" y="0"/>
+          <a:ext cx="0" cy="0"/>
+          <a:chOff x="0" y="0"/>
+          <a:chExt cx="0" cy="0"/>
+        </a:xfrm>
+      </p:grpSpPr>
+      <p:sp>
+        <p:nvSpPr>
+          <p:cNvPr id="2" name="Slide Image Placeholder 1"/>
+          <p:cNvSpPr>
+            <a:spLocks noGrp="1" noRot="1" noChangeAspect="1"/>
+          </p:cNvSpPr>
+          <p:nvPr>
+            <p:ph type="sldImg"/>
+          </p:nvPr>
+        </p:nvSpPr>
+        <p:spPr/>
+      </p:sp>
+      <p:sp>
+        <p:nvSpPr>
+          <p:cNvPr id="3" name="Notes Placeholder 2"/>
+          <p:cNvSpPr>
+            <a:spLocks noGrp="1"/>
+          </p:cNvSpPr>
+          <p:nvPr>
+            <p:ph type="body" idx="1"/>
+          </p:nvPr>
+        </p:nvSpPr>
+        <p:spPr/>
+        <p:txBody>
+          <a:bodyPr/>
+          <a:lstStyle/>
+          <a:p>
+            <a:r>
+              <a:rPr lang="en-US" sz="936" b="0" i="0" kern="1200" dirty="0">
+                <a:solidFill>
+                  <a:schemeClr val="tx1"/>
+                </a:solidFill>
+                <a:effectLst/>
+                <a:latin typeface="+mn-lt"/>
+                <a:ea typeface="+mn-ea"/>
+                <a:cs typeface="+mn-cs"/>
+              </a:rPr>
+              <a:t>When technology improves — e.g. better machinery, faster software, improved logistics — the same K and L combination produces </a:t>
+            </a:r>
+            <a:r>
+              <a:rPr lang="en-US" sz="936" b="0" i="1" kern="1200" dirty="0">
+                <a:solidFill>
+                  <a:schemeClr val="tx1"/>
+                </a:solidFill>
+                <a:effectLst/>
+                <a:latin typeface="+mn-lt"/>
+                <a:ea typeface="+mn-ea"/>
+                <a:cs typeface="+mn-cs"/>
+              </a:rPr>
+              <a:t>more</a:t>
+            </a:r>
+            <a:r>
+              <a:rPr lang="en-US" sz="936" b="0" i="0" kern="1200" dirty="0">
+                <a:solidFill>
+                  <a:schemeClr val="tx1"/>
+                </a:solidFill>
+                <a:effectLst/>
+                <a:latin typeface="+mn-lt"/>
+                <a:ea typeface="+mn-ea"/>
+                <a:cs typeface="+mn-cs"/>
+              </a:rPr>
+              <a:t> output than before (efficiency goes up), or equivalently you need </a:t>
+            </a:r>
+            <a:r>
+              <a:rPr lang="en-US" sz="936" b="0" i="1" kern="1200" dirty="0">
+                <a:solidFill>
+                  <a:schemeClr val="tx1"/>
+                </a:solidFill>
+                <a:effectLst/>
+                <a:latin typeface="+mn-lt"/>
+                <a:ea typeface="+mn-ea"/>
+                <a:cs typeface="+mn-cs"/>
+              </a:rPr>
+              <a:t>less</a:t>
+            </a:r>
+            <a:r>
+              <a:rPr lang="en-US" sz="936" b="0" i="0" kern="1200" dirty="0">
+                <a:solidFill>
+                  <a:schemeClr val="tx1"/>
+                </a:solidFill>
+                <a:effectLst/>
+                <a:latin typeface="+mn-lt"/>
+                <a:ea typeface="+mn-ea"/>
+                <a:cs typeface="+mn-cs"/>
+              </a:rPr>
+              <a:t> K and L to produce the same output.</a:t>
+            </a:r>
+            <a:endParaRPr lang="en-US" dirty="0"/>
+          </a:p>
+        </p:txBody>
+      </p:sp>
+      <p:sp>
+        <p:nvSpPr>
+          <p:cNvPr id="4" name="Slide Number Placeholder 3"/>
+          <p:cNvSpPr>
+            <a:spLocks noGrp="1"/>
+          </p:cNvSpPr>
+          <p:nvPr>
+            <p:ph type="sldNum" sz="quarter" idx="5"/>
+          </p:nvPr>
+        </p:nvSpPr>
+        <p:spPr/>
+        <p:txBody>
+          <a:bodyPr/>
+          <a:lstStyle/>
+          <a:p>
+            <a:fld id="{BA7E51CF-144B-7241-A1FB-D978B63A9AA3}" type="slidenum">
+              <a:rPr lang="nb-NO" smtClean="0"/>
+              <a:t>7</a:t>
+            </a:fld>
+            <a:endParaRPr lang="nb-NO" dirty="0"/>
+          </a:p>
+        </p:txBody>
+      </p:sp>
+    </p:spTree>
+    <p:extLst>
+      <p:ext uri="{BB962C8B-B14F-4D97-AF65-F5344CB8AC3E}">
+        <p14:creationId xmlns:p14="http://schemas.microsoft.com/office/powerpoint/2010/main" val="3171226203"/>
+      </p:ext>
+    </p:extLst>
+  </p:cSld>
+  <p:clrMapOvr>
+    <a:masterClrMapping/>
+  </p:clrMapOvr>
+</p:notes>
+</file>
+
+<file path=ppt/notesSlides/notesSlide3.xml><?xml version="1.0" encoding="utf-8"?>
+<p:notes xmlns:a="http://schemas.openxmlformats.org/drawingml/2006/main" xmlns:r="http://schemas.openxmlformats.org/officeDocument/2006/relationships" xmlns:p="http://schemas.openxmlformats.org/presentationml/2006/main">
+  <p:cSld>
+    <p:spTree>
+      <p:nvGrpSpPr>
+        <p:cNvPr id="1" name=""/>
+        <p:cNvGrpSpPr/>
+        <p:nvPr/>
+      </p:nvGrpSpPr>
+      <p:grpSpPr>
+        <a:xfrm>
+          <a:off x="0" y="0"/>
+          <a:ext cx="0" cy="0"/>
+          <a:chOff x="0" y="0"/>
+          <a:chExt cx="0" cy="0"/>
+        </a:xfrm>
+      </p:grpSpPr>
+      <p:sp>
+        <p:nvSpPr>
+          <p:cNvPr id="2" name="Slide Image Placeholder 1"/>
+          <p:cNvSpPr>
+            <a:spLocks noGrp="1" noRot="1" noChangeAspect="1"/>
+          </p:cNvSpPr>
+          <p:nvPr>
+            <p:ph type="sldImg"/>
+          </p:nvPr>
+        </p:nvSpPr>
+        <p:spPr/>
+      </p:sp>
+      <p:sp>
+        <p:nvSpPr>
+          <p:cNvPr id="3" name="Notes Placeholder 2"/>
+          <p:cNvSpPr>
+            <a:spLocks noGrp="1"/>
+          </p:cNvSpPr>
+          <p:nvPr>
+            <p:ph type="body" idx="1"/>
+          </p:nvPr>
+        </p:nvSpPr>
+        <p:spPr/>
+        <p:txBody>
+          <a:bodyPr/>
+          <a:lstStyle/>
+          <a:p>
+            <a:r>
+              <a:rPr lang="en-US" sz="936" b="1" i="0" kern="1200" dirty="0">
+                <a:solidFill>
+                  <a:schemeClr val="tx1"/>
+                </a:solidFill>
+                <a:effectLst/>
+                <a:latin typeface="+mn-lt"/>
+                <a:ea typeface="+mn-ea"/>
+                <a:cs typeface="+mn-cs"/>
+              </a:rPr>
+              <a:t>Labor (L)</a:t>
+            </a:r>
+            <a:r>
+              <a:rPr lang="en-US" sz="936" b="0" i="0" kern="1200" dirty="0">
+                <a:solidFill>
+                  <a:schemeClr val="tx1"/>
+                </a:solidFill>
+                <a:effectLst/>
+                <a:latin typeface="+mn-lt"/>
+                <a:ea typeface="+mn-ea"/>
+                <a:cs typeface="+mn-cs"/>
+              </a:rPr>
+              <a:t> — the human work applied to production: hours worked, number of workers, their effort/skill. In the short run, a firm can adjust this relatively easily (hire, fire, add overtime shifts).</a:t>
+            </a:r>
+          </a:p>
+          <a:p>
+            <a:r>
+              <a:rPr lang="en-US" sz="936" b="1" i="0" kern="1200" dirty="0">
+                <a:solidFill>
+                  <a:schemeClr val="tx1"/>
+                </a:solidFill>
+                <a:effectLst/>
+                <a:latin typeface="+mn-lt"/>
+                <a:ea typeface="+mn-ea"/>
+                <a:cs typeface="+mn-cs"/>
+              </a:rPr>
+              <a:t>Capital (K)</a:t>
+            </a:r>
+            <a:r>
+              <a:rPr lang="en-US" sz="936" b="0" i="0" kern="1200" dirty="0">
+                <a:solidFill>
+                  <a:schemeClr val="tx1"/>
+                </a:solidFill>
+                <a:effectLst/>
+                <a:latin typeface="+mn-lt"/>
+                <a:ea typeface="+mn-ea"/>
+                <a:cs typeface="+mn-cs"/>
+              </a:rPr>
+              <a:t> — the physical/durable inputs used to produce output: machinery, equipment, buildings, tools. This is treated as </a:t>
+            </a:r>
+            <a:r>
+              <a:rPr lang="en-US" sz="936" b="0" i="1" kern="1200" dirty="0">
+                <a:solidFill>
+                  <a:schemeClr val="tx1"/>
+                </a:solidFill>
+                <a:effectLst/>
+                <a:latin typeface="+mn-lt"/>
+                <a:ea typeface="+mn-ea"/>
+                <a:cs typeface="+mn-cs"/>
+              </a:rPr>
+              <a:t>fixed</a:t>
+            </a:r>
+            <a:r>
+              <a:rPr lang="en-US" sz="936" b="0" i="0" kern="1200" dirty="0">
+                <a:solidFill>
+                  <a:schemeClr val="tx1"/>
+                </a:solidFill>
+                <a:effectLst/>
+                <a:latin typeface="+mn-lt"/>
+                <a:ea typeface="+mn-ea"/>
+                <a:cs typeface="+mn-cs"/>
+              </a:rPr>
+              <a:t> in the short run because it typically takes time to build a new plant or buy new machines — you can't scale it up or down overnight.</a:t>
+            </a:r>
+          </a:p>
+          <a:p>
+            <a:endParaRPr lang="en-US" dirty="0"/>
+          </a:p>
+        </p:txBody>
+      </p:sp>
+      <p:sp>
+        <p:nvSpPr>
+          <p:cNvPr id="4" name="Slide Number Placeholder 3"/>
+          <p:cNvSpPr>
+            <a:spLocks noGrp="1"/>
+          </p:cNvSpPr>
+          <p:nvPr>
+            <p:ph type="sldNum" sz="quarter" idx="5"/>
+          </p:nvPr>
+        </p:nvSpPr>
+        <p:spPr/>
+        <p:txBody>
+          <a:bodyPr/>
+          <a:lstStyle/>
+          <a:p>
+            <a:fld id="{BA7E51CF-144B-7241-A1FB-D978B63A9AA3}" type="slidenum">
+              <a:rPr lang="nb-NO" smtClean="0"/>
+              <a:t>8</a:t>
+            </a:fld>
+            <a:endParaRPr lang="nb-NO" dirty="0"/>
+          </a:p>
+        </p:txBody>
+      </p:sp>
+    </p:spTree>
+    <p:extLst>
+      <p:ext uri="{BB962C8B-B14F-4D97-AF65-F5344CB8AC3E}">
+        <p14:creationId xmlns:p14="http://schemas.microsoft.com/office/powerpoint/2010/main" val="4104917632"/>
+      </p:ext>
+    </p:extLst>
+  </p:cSld>
+  <p:clrMapOvr>
+    <a:masterClrMapping/>
+  </p:clrMapOvr>
+</p:notes>
 </file>
 
 <file path=ppt/slideLayouts/slideLayout1.xml><?xml version="1.0" encoding="utf-8"?>
@@ -17316,13 +17704,7 @@
       </p:grpSpPr>
       <p:pic>
         <p:nvPicPr>
-          <p:cNvPr id="4" name="Picture 3">
-            <a:extLst>
-              <a:ext uri="{FF2B5EF4-FFF2-40B4-BE49-F238E27FC236}">
-                <a16:creationId xmlns:a16="http://schemas.microsoft.com/office/drawing/2014/main" id="{481E0528-CDB3-4A64-8201-464948C26A53}"/>
-              </a:ext>
-            </a:extLst>
-          </p:cNvPr>
+          <p:cNvPr id="2" name="Picture 1" descr="tp_chart_slide17.png"/>
           <p:cNvPicPr>
             <a:picLocks noChangeAspect="1"/>
           </p:cNvPicPr>
@@ -17336,8 +17718,8 @@
         </p:blipFill>
         <p:spPr>
           <a:xfrm>
-            <a:off x="880552" y="345731"/>
-            <a:ext cx="7382896" cy="5023539"/>
+            <a:off x="1156556" y="167640"/>
+            <a:ext cx="6830888" cy="4647937"/>
           </a:xfrm>
           <a:prstGeom prst="rect">
             <a:avLst/>
@@ -17406,19 +17788,11 @@
       </p:sp>
       <p:pic>
         <p:nvPicPr>
-          <p:cNvPr id="4" name="Content Placeholder 3">
-            <a:extLst>
-              <a:ext uri="{FF2B5EF4-FFF2-40B4-BE49-F238E27FC236}">
-                <a16:creationId xmlns:a16="http://schemas.microsoft.com/office/drawing/2014/main" id="{B6083223-0C19-4625-B839-F59AF9E467E6}"/>
-              </a:ext>
-            </a:extLst>
-          </p:cNvPr>
+          <p:cNvPr id="3" name="Picture 2" descr="ap_mp_chart_slide18.png"/>
           <p:cNvPicPr>
-            <a:picLocks noGrp="1" noChangeAspect="1"/>
+            <a:picLocks noChangeAspect="1"/>
           </p:cNvPicPr>
-          <p:nvPr>
-            <p:ph idx="1"/>
-          </p:nvPr>
+          <p:nvPr/>
         </p:nvPicPr>
         <p:blipFill>
           <a:blip r:embed="rId2"/>
@@ -17517,63 +17891,57 @@
           <a:bodyPr/>
           <a:lstStyle/>
           <a:p>
-            <a:pPr eaLnBrk="1" hangingPunct="1"/>
-            <a:r>
-              <a:rPr lang="en-US" altLang="en-US" sz="1800" dirty="0"/>
-              <a:t>From the previous example, we can see that as we increase labor the additional output produced declines</a:t>
-            </a:r>
-          </a:p>
-          <a:p>
-            <a:pPr eaLnBrk="1" hangingPunct="1"/>
-            <a:r>
-              <a:rPr lang="en-US" altLang="en-US" sz="1800" b="1" dirty="0">
-                <a:solidFill>
-                  <a:schemeClr val="accent4">
-                    <a:lumMod val="60000"/>
-                    <a:lumOff val="40000"/>
-                  </a:schemeClr>
-                </a:solidFill>
-              </a:rPr>
-              <a:t>Law of Diminishing Marginal Returns</a:t>
-            </a:r>
-            <a:r>
-              <a:rPr lang="en-US" altLang="en-US" sz="1800" dirty="0"/>
-              <a:t>: when increasing one unit of production, while holding other factors constant, results in lower levels of output.</a:t>
+            <a:r>
+              <a:rPr lang="en-US" b="1" dirty="0"/>
+              <a:t>The law of diminishing marginal returns</a:t>
+            </a:r>
+            <a:r>
+              <a:rPr lang="en-US" dirty="0"/>
+              <a:t>: as you keep adding more units of </a:t>
+            </a:r>
+            <a:r>
+              <a:rPr lang="en-US" i="1" dirty="0"/>
+              <a:t>one</a:t>
+            </a:r>
+            <a:r>
+              <a:rPr lang="en-US" dirty="0"/>
+              <a:t> variable input (here, labor) while holding all other inputs fixed (here, capital = 10 units), the </a:t>
+            </a:r>
+            <a:r>
+              <a:rPr lang="en-US" i="1" dirty="0"/>
+              <a:t>additional</a:t>
+            </a:r>
+            <a:r>
+              <a:rPr lang="en-US" dirty="0"/>
+              <a:t> output from each extra unit (the marginal product) eventually starts to fall. </a:t>
             </a:r>
           </a:p>
           <a:p>
             <a:pPr lvl="1"/>
             <a:r>
+              <a:rPr lang="en-US"/>
+              <a:t>Diminishing </a:t>
+            </a:r>
+            <a:r>
               <a:rPr lang="en-US" dirty="0"/>
-              <a:t>Production becomes less efficient </a:t>
-            </a:r>
-          </a:p>
-          <a:p>
-            <a:pPr lvl="1"/>
+              <a:t>marginal returns does </a:t>
+            </a:r>
+            <a:r>
+              <a:rPr lang="en-US" i="1" dirty="0"/>
+              <a:t>not</a:t>
+            </a:r>
             <a:r>
               <a:rPr lang="en-US" dirty="0"/>
-              <a:t>Ex. </a:t>
-            </a:r>
-            <a:r>
-              <a:rPr lang="nb-NO" dirty="0"/>
-              <a:t>Haaland</a:t>
+              <a:t> mean total output is falling — output is still rising, just at a decreasing rate — until marginal product hits zero (L=8 in the table), at which point total output peaks (Q=112) and would start to </a:t>
+            </a:r>
+            <a:r>
+              <a:rPr lang="en-US" i="1" dirty="0"/>
+              <a:t>decline</a:t>
             </a:r>
             <a:r>
               <a:rPr lang="en-US" dirty="0"/>
-              <a:t> scores 3 goals for the first 20 games of the season, on the 21</a:t>
-            </a:r>
-            <a:r>
-              <a:rPr lang="en-US" baseline="30000" dirty="0"/>
-              <a:t>st</a:t>
-            </a:r>
-            <a:r>
-              <a:rPr lang="en-US" dirty="0"/>
-              <a:t> he scores “just” 2 goals </a:t>
-            </a:r>
-          </a:p>
-          <a:p>
-            <a:pPr lvl="1"/>
-            <a:endParaRPr lang="en-US" dirty="0"/>
+              <a:t> if you kept adding labor beyond that.</a:t>
+            </a:r>
           </a:p>
         </p:txBody>
       </p:sp>
@@ -17871,63 +18239,88 @@
             <p:ph idx="1"/>
           </p:nvPr>
         </p:nvSpPr>
-        <p:spPr/>
+        <p:spPr>
+          <a:xfrm>
+            <a:off x="628650" y="1425383"/>
+            <a:ext cx="7578090" cy="2925637"/>
+          </a:xfrm>
+        </p:spPr>
         <p:txBody>
           <a:bodyPr>
             <a:noAutofit/>
           </a:bodyPr>
           <a:lstStyle/>
           <a:p>
-            <a:r>
-              <a:rPr lang="it-IT" sz="2000" dirty="0"/>
-              <a:t>Fixed costs</a:t>
-            </a:r>
-          </a:p>
-          <a:p>
-            <a:pPr lvl="1"/>
-            <a:r>
-              <a:rPr lang="it-IT" sz="2000" dirty="0"/>
-              <a:t>Ex. Same owner, new team (FC Red Bull Salzburg and RB Leipzig) need a new striker. He may score few goals.</a:t>
-            </a:r>
-          </a:p>
-          <a:p>
-            <a:r>
-              <a:rPr lang="it-IT" sz="2000" dirty="0"/>
-              <a:t>Lower levels of Productivity </a:t>
-            </a:r>
-          </a:p>
-          <a:p>
-            <a:pPr lvl="1"/>
-            <a:r>
-              <a:rPr lang="it-IT" sz="2000" dirty="0"/>
-              <a:t>Too much is never good</a:t>
-            </a:r>
-          </a:p>
-          <a:p>
-            <a:r>
-              <a:rPr lang="it-IT" sz="2000" dirty="0"/>
-              <a:t>Limited demand</a:t>
-            </a:r>
-          </a:p>
-          <a:p>
-            <a:r>
-              <a:rPr lang="it-IT" sz="2000" dirty="0"/>
-              <a:t>Negative impact on working conditions</a:t>
-            </a:r>
-          </a:p>
-          <a:p>
-            <a:r>
-              <a:rPr lang="it-IT" sz="2000" dirty="0"/>
-              <a:t>Short-run</a:t>
-            </a:r>
-          </a:p>
-          <a:p>
-            <a:pPr lvl="1"/>
-            <a:r>
-              <a:rPr lang="it-IT" sz="2000" dirty="0"/>
-              <a:t>In the long-run, we have more time to adapt to new working conditions.</a:t>
-            </a:r>
-            <a:endParaRPr lang="en-US" sz="2000" dirty="0"/>
+            <a:pPr>
+              <a:defRPr sz="1900"/>
+            </a:pPr>
+            <a:r>
+              <a:t>Comes from pairing a fixed input with a variable one</a:t>
+            </a:r>
+          </a:p>
+          <a:p>
+            <a:pPr lvl="1">
+              <a:defRPr sz="1700"/>
+            </a:pPr>
+            <a:r>
+              <a:t>Fixed: capital (or a club's existing squad/system)</a:t>
+            </a:r>
+          </a:p>
+          <a:p>
+            <a:pPr lvl="1">
+              <a:defRPr sz="1700"/>
+            </a:pPr>
+            <a:r>
+              <a:t>Variable: labor (or players added to that setup)</a:t>
+            </a:r>
+          </a:p>
+          <a:p>
+            <a:pPr>
+              <a:defRPr sz="1900"/>
+            </a:pPr>
+            <a:r>
+              <a:t>Adding more labor to fixed capital lowers each extra unit's output</a:t>
+            </a:r>
+          </a:p>
+          <a:p>
+            <a:pPr lvl="1">
+              <a:defRPr sz="1700"/>
+            </a:pPr>
+            <a:r>
+              <a:t>Less capital per worker, more congestion and coordination costs</a:t>
+            </a:r>
+          </a:p>
+          <a:p>
+            <a:pPr lvl="1">
+              <a:defRPr sz="1700"/>
+            </a:pPr>
+            <a:r>
+              <a:t>Ex. A striker moving between RB Leipzig and Salzburg (same owner) joins an established system — may score fewer goals than expected at first</a:t>
+            </a:r>
+          </a:p>
+          <a:p>
+            <a:pPr>
+              <a:defRPr sz="1900"/>
+            </a:pPr>
+            <a:r>
+              <a:t>It's a short-run phenomenon</a:t>
+            </a:r>
+          </a:p>
+          <a:p>
+            <a:pPr lvl="1">
+              <a:defRPr sz="1700"/>
+            </a:pPr>
+            <a:r>
+              <a:t>Assumes capital is fixed — true only in the short run</a:t>
+            </a:r>
+          </a:p>
+          <a:p>
+            <a:pPr lvl="1">
+              <a:defRPr sz="1700"/>
+            </a:pPr>
+            <a:r>
+              <a:t>Long run: capital can expand too, so the constraint disappears</a:t>
+            </a:r>
           </a:p>
         </p:txBody>
       </p:sp>
@@ -23629,7 +24022,7 @@
         <p:spPr/>
         <p:txBody>
           <a:bodyPr>
-            <a:normAutofit fontScale="92500" lnSpcReduction="20000"/>
+            <a:normAutofit/>
           </a:bodyPr>
           <a:lstStyle/>
           <a:p>
@@ -23641,57 +24034,67 @@
           <a:p>
             <a:pPr lvl="1"/>
             <a:r>
-              <a:rPr lang="en-GB" sz="2400" dirty="0"/>
-              <a:t>Given the choices of individual firms, market supply is determined by aggregating over the supply of the firms in the market</a:t>
+              <a:rPr lang="en-US" dirty="0"/>
+              <a:t>The aggregation of all individual firms' supply curves in a market.</a:t>
+            </a:r>
+            <a:endParaRPr lang="en-GB" sz="2200" dirty="0"/>
+          </a:p>
+          <a:p>
+            <a:r>
+              <a:rPr lang="en-US" sz="2400" b="1" dirty="0"/>
+              <a:t>Short run</a:t>
+            </a:r>
+            <a:r>
+              <a:rPr lang="en-US" sz="2400" dirty="0"/>
+              <a:t> supply tends to be </a:t>
+            </a:r>
+            <a:r>
+              <a:rPr lang="en-US" sz="2400" b="1" dirty="0"/>
+              <a:t>less elastic</a:t>
+            </a:r>
+            <a:r>
+              <a:rPr lang="en-US" sz="2400" dirty="0"/>
+              <a:t> (inelastic) </a:t>
             </a:r>
           </a:p>
           <a:p>
             <a:pPr lvl="1"/>
             <a:r>
-              <a:rPr lang="en-GB" sz="2400" dirty="0"/>
-              <a:t>Short run: the supply curve is elastic</a:t>
-            </a:r>
-          </a:p>
-          <a:p>
-            <a:pPr lvl="2"/>
-            <a:r>
-              <a:rPr lang="en-GB" sz="2200" dirty="0"/>
-              <a:t>Labour deployed </a:t>
-            </a:r>
-          </a:p>
-          <a:p>
-            <a:pPr lvl="2"/>
-            <a:r>
-              <a:rPr lang="en-GB" sz="2200" dirty="0"/>
-              <a:t>Raw material inputs</a:t>
-            </a:r>
-          </a:p>
-          <a:p>
-            <a:pPr lvl="2"/>
-            <a:r>
-              <a:rPr lang="en-GB" sz="2200" dirty="0"/>
-              <a:t>Overtime hours</a:t>
+              <a:rPr lang="en-US" dirty="0"/>
+              <a:t> Firms are stuck with existing capacity and can only change </a:t>
+            </a:r>
+            <a:r>
+              <a:rPr lang="en-US" dirty="0" err="1"/>
+              <a:t>labour</a:t>
+            </a:r>
+            <a:r>
+              <a:rPr lang="en-US" dirty="0"/>
+              <a:t>/overtime/materials at the margin.</a:t>
+            </a:r>
+          </a:p>
+          <a:p>
+            <a:r>
+              <a:rPr lang="en-US" sz="2400" b="1" dirty="0"/>
+              <a:t>Long run</a:t>
+            </a:r>
+            <a:r>
+              <a:rPr lang="en-US" sz="2400" dirty="0"/>
+              <a:t> supply tends to be </a:t>
+            </a:r>
+            <a:r>
+              <a:rPr lang="en-US" sz="2400" b="1" dirty="0"/>
+              <a:t>more elastic</a:t>
+            </a:r>
+            <a:r>
+              <a:rPr lang="en-US" sz="2400" dirty="0"/>
+              <a:t> </a:t>
             </a:r>
           </a:p>
           <a:p>
             <a:pPr lvl="1"/>
             <a:r>
-              <a:rPr lang="en-GB" sz="2400" dirty="0"/>
-              <a:t>Long run: the supply curve is inelastic</a:t>
-            </a:r>
-          </a:p>
-          <a:p>
-            <a:pPr lvl="2"/>
-            <a:r>
-              <a:rPr lang="en-GB" sz="2200" dirty="0"/>
-              <a:t>Firms are more responsive to changes in prices</a:t>
-            </a:r>
-          </a:p>
-          <a:p>
-            <a:pPr lvl="3"/>
-            <a:r>
-              <a:rPr lang="en-GB" sz="2000" dirty="0"/>
-              <a:t>Open new plants, expand existing plants or adopt new technologies</a:t>
+              <a:rPr lang="en-US" dirty="0"/>
+              <a:t>firms can build new plants, enter the market, or adopt new technology, so output responds much more to price changes.</a:t>
             </a:r>
           </a:p>
           <a:p>
@@ -27493,6 +27896,21 @@
 </file>
 
 <file path=customXml/item1.xml><?xml version="1.0" encoding="utf-8"?>
+<?mso-contentType ?>
+<FormTemplates xmlns="http://schemas.microsoft.com/sharepoint/v3/contenttype/forms">
+  <Display>DocumentLibraryForm</Display>
+  <Edit>DocumentLibraryForm</Edit>
+  <New>DocumentLibraryForm</New>
+</FormTemplates>
+</file>
+
+<file path=customXml/item2.xml><?xml version="1.0" encoding="utf-8"?>
+<p:properties xmlns:p="http://schemas.microsoft.com/office/2006/metadata/properties" xmlns:xsi="http://www.w3.org/2001/XMLSchema-instance" xmlns:pc="http://schemas.microsoft.com/office/infopath/2007/PartnerControls">
+  <documentManagement/>
+</p:properties>
+</file>
+
+<file path=customXml/item3.xml><?xml version="1.0" encoding="utf-8"?>
 <ct:contentTypeSchema xmlns:ct="http://schemas.microsoft.com/office/2006/metadata/contentType" xmlns:ma="http://schemas.microsoft.com/office/2006/metadata/properties/metaAttributes" ct:_="" ma:_="" ma:contentTypeName="Dokument" ma:contentTypeID="0x010100086B82B2E673BB48BBFD907EF88B1F72" ma:contentTypeVersion="0" ma:contentTypeDescription="Opprett et nytt dokument." ma:contentTypeScope="" ma:versionID="0653049da3c7d6103ba0b9e54f21c3f6">
   <xsd:schema xmlns:xsd="http://www.w3.org/2001/XMLSchema" xmlns:xs="http://www.w3.org/2001/XMLSchema" xmlns:p="http://schemas.microsoft.com/office/2006/metadata/properties" targetNamespace="http://schemas.microsoft.com/office/2006/metadata/properties" ma:root="true" ma:fieldsID="3e2500873ed525c1cf306a41cba81ed5">
     <xsd:element name="properties">
@@ -27606,22 +28024,30 @@
 </ct:contentTypeSchema>
 </file>
 
-<file path=customXml/item2.xml><?xml version="1.0" encoding="utf-8"?>
-<?mso-contentType ?>
-<FormTemplates xmlns="http://schemas.microsoft.com/sharepoint/v3/contenttype/forms">
-  <Display>DocumentLibraryForm</Display>
-  <Edit>DocumentLibraryForm</Edit>
-  <New>DocumentLibraryForm</New>
-</FormTemplates>
+<file path=customXml/itemProps1.xml><?xml version="1.0" encoding="utf-8"?>
+<ds:datastoreItem xmlns:ds="http://schemas.openxmlformats.org/officeDocument/2006/customXml" ds:itemID="{27479CE2-CFF2-495B-B6E0-2F66375CDBBB}">
+  <ds:schemaRefs>
+    <ds:schemaRef ds:uri="http://schemas.microsoft.com/sharepoint/v3/contenttype/forms"/>
+  </ds:schemaRefs>
+</ds:datastoreItem>
 </file>
 
-<file path=customXml/item3.xml><?xml version="1.0" encoding="utf-8"?>
-<p:properties xmlns:p="http://schemas.microsoft.com/office/2006/metadata/properties" xmlns:xsi="http://www.w3.org/2001/XMLSchema-instance" xmlns:pc="http://schemas.microsoft.com/office/infopath/2007/PartnerControls">
-  <documentManagement/>
-</p:properties>
+<file path=customXml/itemProps2.xml><?xml version="1.0" encoding="utf-8"?>
+<ds:datastoreItem xmlns:ds="http://schemas.openxmlformats.org/officeDocument/2006/customXml" ds:itemID="{3CAC7484-FE6E-40E6-83CA-83D55D847BA8}">
+  <ds:schemaRefs>
+    <ds:schemaRef ds:uri="http://schemas.microsoft.com/office/2006/documentManagement/types"/>
+    <ds:schemaRef ds:uri="http://schemas.microsoft.com/office/2006/metadata/properties"/>
+    <ds:schemaRef ds:uri="http://schemas.microsoft.com/office/infopath/2007/PartnerControls"/>
+    <ds:schemaRef ds:uri="http://schemas.openxmlformats.org/package/2006/metadata/core-properties"/>
+    <ds:schemaRef ds:uri="http://purl.org/dc/dcmitype/"/>
+    <ds:schemaRef ds:uri="http://purl.org/dc/terms/"/>
+    <ds:schemaRef ds:uri="http://www.w3.org/XML/1998/namespace"/>
+    <ds:schemaRef ds:uri="http://purl.org/dc/elements/1.1/"/>
+  </ds:schemaRefs>
+</ds:datastoreItem>
 </file>
 
-<file path=customXml/itemProps1.xml><?xml version="1.0" encoding="utf-8"?>
+<file path=customXml/itemProps3.xml><?xml version="1.0" encoding="utf-8"?>
 <ds:datastoreItem xmlns:ds="http://schemas.openxmlformats.org/officeDocument/2006/customXml" ds:itemID="{C299F0B8-F1FA-4547-8345-D1C345C8ADDE}">
   <ds:schemaRefs>
     <ds:schemaRef ds:uri="http://schemas.microsoft.com/office/2006/metadata/contentType"/>
@@ -27635,27 +28061,4 @@
     <ds:schemaRef ds:uri="http://schemas.microsoft.com/office/infopath/2007/PartnerControls"/>
   </ds:schemaRefs>
 </ds:datastoreItem>
-</file>
-
-<file path=customXml/itemProps2.xml><?xml version="1.0" encoding="utf-8"?>
-<ds:datastoreItem xmlns:ds="http://schemas.openxmlformats.org/officeDocument/2006/customXml" ds:itemID="{27479CE2-CFF2-495B-B6E0-2F66375CDBBB}">
-  <ds:schemaRefs>
-    <ds:schemaRef ds:uri="http://schemas.microsoft.com/sharepoint/v3/contenttype/forms"/>
-  </ds:schemaRefs>
-</ds:datastoreItem>
-</file>
-
-<file path=customXml/itemProps3.xml><?xml version="1.0" encoding="utf-8"?>
-<ds:datastoreItem xmlns:ds="http://schemas.openxmlformats.org/officeDocument/2006/customXml" ds:itemID="{3CAC7484-FE6E-40E6-83CA-83D55D847BA8}">
-  <ds:schemaRefs>
-    <ds:schemaRef ds:uri="http://schemas.microsoft.com/office/2006/documentManagement/types"/>
-    <ds:schemaRef ds:uri="http://schemas.microsoft.com/office/2006/metadata/properties"/>
-    <ds:schemaRef ds:uri="http://schemas.microsoft.com/office/infopath/2007/PartnerControls"/>
-    <ds:schemaRef ds:uri="http://schemas.openxmlformats.org/package/2006/metadata/core-properties"/>
-    <ds:schemaRef ds:uri="http://purl.org/dc/dcmitype/"/>
-    <ds:schemaRef ds:uri="http://purl.org/dc/terms/"/>
-    <ds:schemaRef ds:uri="http://www.w3.org/XML/1998/namespace"/>
-    <ds:schemaRef ds:uri="http://purl.org/dc/elements/1.1/"/>
-  </ds:schemaRefs>
-</ds:datastoreItem>
 </file>
--- a/lectures/L4.pptx
+++ b/lectures/L4.pptx
@@ -4431,7 +4431,7 @@
 </file>
 
 <file path=ppt/diagrams/colors1.xml><?xml version="1.0" encoding="utf-8"?>
-<dgm:colorsDef xmlns:dgm="http://schemas.openxmlformats.org/drawingml/2006/diagram" xmlns:a="http://schemas.openxmlformats.org/drawingml/2006/main" uniqueId="urn:microsoft.com/office/officeart/2005/8/colors/accent1_2">
+<dgm:colorsDef xmlns:dgm="http://schemas.openxmlformats.org/drawingml/2006/diagram" xmlns:a="http://schemas.openxmlformats.org/drawingml/2006/main" uniqueId="urn:microsoft.com/office/officeart/2005/8/colors/accent1_2#1">
   <dgm:title val=""/>
   <dgm:desc val=""/>
   <dgm:catLst>
@@ -5181,7 +5181,7 @@
 <dgm:dataModel xmlns:dgm="http://schemas.openxmlformats.org/drawingml/2006/diagram" xmlns:a="http://schemas.openxmlformats.org/drawingml/2006/main">
   <dgm:ptLst>
     <dgm:pt modelId="{749807B3-B547-48C7-B658-74575A1DC2AB}" type="doc">
-      <dgm:prSet loTypeId="urn:microsoft.com/office/officeart/2005/8/layout/chart3" loCatId="cycle" qsTypeId="urn:microsoft.com/office/officeart/2005/8/quickstyle/simple1" qsCatId="simple" csTypeId="urn:microsoft.com/office/officeart/2005/8/colors/accent1_2" csCatId="accent1" phldr="1"/>
+      <dgm:prSet loTypeId="urn:microsoft.com/office/officeart/2005/8/layout/chart3" loCatId="cycle" qsTypeId="urn:microsoft.com/office/officeart/2005/8/quickstyle/simple1#1" qsCatId="simple" csTypeId="urn:microsoft.com/office/officeart/2005/8/colors/accent1_2#1" csCatId="accent1" phldr="1"/>
       <dgm:spPr/>
     </dgm:pt>
     <dgm:pt modelId="{8E4B6490-6063-4D3B-AE08-15C6A72F6F59}">
@@ -6802,7 +6802,7 @@
 </file>
 
 <file path=ppt/diagrams/quickStyle1.xml><?xml version="1.0" encoding="utf-8"?>
-<dgm:styleDef xmlns:dgm="http://schemas.openxmlformats.org/drawingml/2006/diagram" xmlns:a="http://schemas.openxmlformats.org/drawingml/2006/main" uniqueId="urn:microsoft.com/office/officeart/2005/8/quickstyle/simple1">
+<dgm:styleDef xmlns:dgm="http://schemas.openxmlformats.org/drawingml/2006/diagram" xmlns:a="http://schemas.openxmlformats.org/drawingml/2006/main" uniqueId="urn:microsoft.com/office/officeart/2005/8/quickstyle/simple1#1">
   <dgm:title val=""/>
   <dgm:desc val=""/>
   <dgm:catLst>
@@ -7929,7 +7929,7 @@
           <a:p>
             <a:fld id="{2A8A781A-1859-4C85-BF75-12C8100C455E}" type="datetimeFigureOut">
               <a:rPr lang="nb-NO" smtClean="0"/>
-              <a:t>14.08.2026</a:t>
+              <a:t>06.09.2026</a:t>
             </a:fld>
             <a:endParaRPr lang="nb-NO" dirty="0"/>
           </a:p>
@@ -8106,7 +8106,7 @@
           <a:p>
             <a:fld id="{8B442447-825E-F44A-AE66-BBD0FC2F1FF6}" type="datetimeFigureOut">
               <a:rPr lang="nb-NO" smtClean="0"/>
-              <a:t>14.08.2026</a:t>
+              <a:t>06.09.2026</a:t>
             </a:fld>
             <a:endParaRPr lang="nb-NO" dirty="0"/>
           </a:p>
@@ -8753,6 +8753,366 @@
     <p:extLst>
       <p:ext uri="{BB962C8B-B14F-4D97-AF65-F5344CB8AC3E}">
         <p14:creationId xmlns:p14="http://schemas.microsoft.com/office/powerpoint/2010/main" val="4104917632"/>
+      </p:ext>
+    </p:extLst>
+  </p:cSld>
+  <p:clrMapOvr>
+    <a:masterClrMapping/>
+  </p:clrMapOvr>
+</p:notes>
+</file>
+
+<file path=ppt/notesSlides/notesSlide4.xml><?xml version="1.0" encoding="utf-8"?>
+<p:notes xmlns:a="http://schemas.openxmlformats.org/drawingml/2006/main" xmlns:r="http://schemas.openxmlformats.org/officeDocument/2006/relationships" xmlns:p="http://schemas.openxmlformats.org/presentationml/2006/main">
+  <p:cSld>
+    <p:spTree>
+      <p:nvGrpSpPr>
+        <p:cNvPr id="1" name=""/>
+        <p:cNvGrpSpPr/>
+        <p:nvPr/>
+      </p:nvGrpSpPr>
+      <p:grpSpPr>
+        <a:xfrm>
+          <a:off x="0" y="0"/>
+          <a:ext cx="0" cy="0"/>
+          <a:chOff x="0" y="0"/>
+          <a:chExt cx="0" cy="0"/>
+        </a:xfrm>
+      </p:grpSpPr>
+      <p:sp>
+        <p:nvSpPr>
+          <p:cNvPr id="2" name="Slide Image Placeholder 1"/>
+          <p:cNvSpPr>
+            <a:spLocks noGrp="1" noRot="1" noChangeAspect="1"/>
+          </p:cNvSpPr>
+          <p:nvPr>
+            <p:ph type="sldImg"/>
+          </p:nvPr>
+        </p:nvSpPr>
+        <p:spPr/>
+      </p:sp>
+      <p:sp>
+        <p:nvSpPr>
+          <p:cNvPr id="3" name="Notes Placeholder 2"/>
+          <p:cNvSpPr>
+            <a:spLocks noGrp="1"/>
+          </p:cNvSpPr>
+          <p:nvPr>
+            <p:ph type="body" idx="1"/>
+          </p:nvPr>
+        </p:nvSpPr>
+        <p:spPr/>
+        <p:txBody>
+          <a:bodyPr/>
+          <a:lstStyle/>
+          <a:p>
+            <a:pPr lvl="0"/>
+            <a:r>
+              <a:rPr lang="en-US" sz="936" b="0" i="0" kern="1200" dirty="0">
+                <a:solidFill>
+                  <a:schemeClr val="tx1"/>
+                </a:solidFill>
+                <a:effectLst/>
+                <a:latin typeface="+mn-lt"/>
+                <a:ea typeface="+mn-ea"/>
+                <a:cs typeface="+mn-cs"/>
+              </a:rPr>
+              <a:t>The firm produces at output </a:t>
+            </a:r>
+            <a:r>
+              <a:rPr lang="en-US" sz="936" b="1" i="0" kern="1200" dirty="0">
+                <a:solidFill>
+                  <a:schemeClr val="tx1"/>
+                </a:solidFill>
+                <a:effectLst/>
+                <a:latin typeface="+mn-lt"/>
+                <a:ea typeface="+mn-ea"/>
+                <a:cs typeface="+mn-cs"/>
+              </a:rPr>
+              <a:t>q*</a:t>
+            </a:r>
+            <a:r>
+              <a:rPr lang="en-US" sz="936" b="0" i="0" kern="1200" dirty="0">
+                <a:solidFill>
+                  <a:schemeClr val="tx1"/>
+                </a:solidFill>
+                <a:effectLst/>
+                <a:latin typeface="+mn-lt"/>
+                <a:ea typeface="+mn-ea"/>
+                <a:cs typeface="+mn-cs"/>
+              </a:rPr>
+              <a:t>, where the price line (P = MR) crosses </a:t>
+            </a:r>
+            <a:r>
+              <a:rPr lang="en-US" sz="936" b="1" i="0" kern="1200" dirty="0">
+                <a:solidFill>
+                  <a:schemeClr val="tx1"/>
+                </a:solidFill>
+                <a:effectLst/>
+                <a:latin typeface="+mn-lt"/>
+                <a:ea typeface="+mn-ea"/>
+                <a:cs typeface="+mn-cs"/>
+              </a:rPr>
+              <a:t>MC</a:t>
+            </a:r>
+            <a:r>
+              <a:rPr lang="en-US" sz="936" b="0" i="0" kern="1200" dirty="0">
+                <a:solidFill>
+                  <a:schemeClr val="tx1"/>
+                </a:solidFill>
+                <a:effectLst/>
+                <a:latin typeface="+mn-lt"/>
+                <a:ea typeface="+mn-ea"/>
+                <a:cs typeface="+mn-cs"/>
+              </a:rPr>
+              <a:t> — that's the profit-maximizing quantity (the MR = MC rule from slide 52, applied here).</a:t>
+            </a:r>
+          </a:p>
+          <a:p>
+            <a:pPr lvl="0"/>
+            <a:r>
+              <a:rPr lang="en-US" sz="936" b="0" i="0" kern="1200" dirty="0">
+                <a:solidFill>
+                  <a:schemeClr val="tx1"/>
+                </a:solidFill>
+                <a:effectLst/>
+                <a:latin typeface="+mn-lt"/>
+                <a:ea typeface="+mn-ea"/>
+                <a:cs typeface="+mn-cs"/>
+              </a:rPr>
+              <a:t>At that output: price is </a:t>
+            </a:r>
+            <a:r>
+              <a:rPr lang="en-US" sz="936" b="1" i="0" kern="1200" dirty="0">
+                <a:solidFill>
+                  <a:schemeClr val="tx1"/>
+                </a:solidFill>
+                <a:effectLst/>
+                <a:latin typeface="+mn-lt"/>
+                <a:ea typeface="+mn-ea"/>
+                <a:cs typeface="+mn-cs"/>
+              </a:rPr>
+              <a:t>D</a:t>
+            </a:r>
+            <a:r>
+              <a:rPr lang="en-US" sz="936" b="0" i="0" kern="1200" dirty="0">
+                <a:solidFill>
+                  <a:schemeClr val="tx1"/>
+                </a:solidFill>
+                <a:effectLst/>
+                <a:latin typeface="+mn-lt"/>
+                <a:ea typeface="+mn-ea"/>
+                <a:cs typeface="+mn-cs"/>
+              </a:rPr>
+              <a:t>, but ATC is </a:t>
+            </a:r>
+            <a:r>
+              <a:rPr lang="en-US" sz="936" b="1" i="0" kern="1200" dirty="0">
+                <a:solidFill>
+                  <a:schemeClr val="tx1"/>
+                </a:solidFill>
+                <a:effectLst/>
+                <a:latin typeface="+mn-lt"/>
+                <a:ea typeface="+mn-ea"/>
+                <a:cs typeface="+mn-cs"/>
+              </a:rPr>
+              <a:t>B</a:t>
+            </a:r>
+            <a:r>
+              <a:rPr lang="en-US" sz="936" b="0" i="0" kern="1200" dirty="0">
+                <a:solidFill>
+                  <a:schemeClr val="tx1"/>
+                </a:solidFill>
+                <a:effectLst/>
+                <a:latin typeface="+mn-lt"/>
+                <a:ea typeface="+mn-ea"/>
+                <a:cs typeface="+mn-cs"/>
+              </a:rPr>
+              <a:t> (point B, height C) — so </a:t>
+            </a:r>
+            <a:r>
+              <a:rPr lang="en-US" sz="936" b="1" i="0" kern="1200" dirty="0">
+                <a:solidFill>
+                  <a:schemeClr val="tx1"/>
+                </a:solidFill>
+                <a:effectLst/>
+                <a:latin typeface="+mn-lt"/>
+                <a:ea typeface="+mn-ea"/>
+                <a:cs typeface="+mn-cs"/>
+              </a:rPr>
+              <a:t>P &lt; ATC</a:t>
+            </a:r>
+            <a:r>
+              <a:rPr lang="en-US" sz="936" b="0" i="0" kern="1200" dirty="0">
+                <a:solidFill>
+                  <a:schemeClr val="tx1"/>
+                </a:solidFill>
+                <a:effectLst/>
+                <a:latin typeface="+mn-lt"/>
+                <a:ea typeface="+mn-ea"/>
+                <a:cs typeface="+mn-cs"/>
+              </a:rPr>
+              <a:t>. The firm is making a loss.</a:t>
+            </a:r>
+          </a:p>
+          <a:p>
+            <a:pPr lvl="0"/>
+            <a:r>
+              <a:rPr lang="en-US" sz="936" b="0" i="0" kern="1200" dirty="0">
+                <a:solidFill>
+                  <a:schemeClr val="tx1"/>
+                </a:solidFill>
+                <a:effectLst/>
+                <a:latin typeface="+mn-lt"/>
+                <a:ea typeface="+mn-ea"/>
+                <a:cs typeface="+mn-cs"/>
+              </a:rPr>
+              <a:t>The pink rectangle (</a:t>
+            </a:r>
+            <a:r>
+              <a:rPr lang="en-US" sz="936" b="1" i="0" kern="1200" dirty="0">
+                <a:solidFill>
+                  <a:schemeClr val="tx1"/>
+                </a:solidFill>
+                <a:effectLst/>
+                <a:latin typeface="+mn-lt"/>
+                <a:ea typeface="+mn-ea"/>
+                <a:cs typeface="+mn-cs"/>
+              </a:rPr>
+              <a:t>C–D</a:t>
+            </a:r>
+            <a:r>
+              <a:rPr lang="en-US" sz="936" b="0" i="0" kern="1200" dirty="0">
+                <a:solidFill>
+                  <a:schemeClr val="tx1"/>
+                </a:solidFill>
+                <a:effectLst/>
+                <a:latin typeface="+mn-lt"/>
+                <a:ea typeface="+mn-ea"/>
+                <a:cs typeface="+mn-cs"/>
+              </a:rPr>
+              <a:t>, width q*) is that loss: (ATC − P) × q* — the same "loss box" logic used for profit boxes elsewhere in the course, just below zero.</a:t>
+            </a:r>
+          </a:p>
+          <a:p>
+            <a:pPr lvl="0"/>
+            <a:r>
+              <a:rPr lang="en-US" sz="936" b="0" i="0" kern="1200" dirty="0">
+                <a:solidFill>
+                  <a:schemeClr val="tx1"/>
+                </a:solidFill>
+                <a:effectLst/>
+                <a:latin typeface="+mn-lt"/>
+                <a:ea typeface="+mn-ea"/>
+                <a:cs typeface="+mn-cs"/>
+              </a:rPr>
+              <a:t>However, price </a:t>
+            </a:r>
+            <a:r>
+              <a:rPr lang="en-US" sz="936" b="1" i="0" kern="1200" dirty="0">
+                <a:solidFill>
+                  <a:schemeClr val="tx1"/>
+                </a:solidFill>
+                <a:effectLst/>
+                <a:latin typeface="+mn-lt"/>
+                <a:ea typeface="+mn-ea"/>
+                <a:cs typeface="+mn-cs"/>
+              </a:rPr>
+              <a:t>D</a:t>
+            </a:r>
+            <a:r>
+              <a:rPr lang="en-US" sz="936" b="0" i="0" kern="1200" dirty="0">
+                <a:solidFill>
+                  <a:schemeClr val="tx1"/>
+                </a:solidFill>
+                <a:effectLst/>
+                <a:latin typeface="+mn-lt"/>
+                <a:ea typeface="+mn-ea"/>
+                <a:cs typeface="+mn-cs"/>
+              </a:rPr>
+              <a:t> is still </a:t>
+            </a:r>
+            <a:r>
+              <a:rPr lang="en-US" sz="936" b="0" i="1" kern="1200" dirty="0">
+                <a:solidFill>
+                  <a:schemeClr val="tx1"/>
+                </a:solidFill>
+                <a:effectLst/>
+                <a:latin typeface="+mn-lt"/>
+                <a:ea typeface="+mn-ea"/>
+                <a:cs typeface="+mn-cs"/>
+              </a:rPr>
+              <a:t>above</a:t>
+            </a:r>
+            <a:r>
+              <a:rPr lang="en-US" sz="936" b="0" i="0" kern="1200" dirty="0">
+                <a:solidFill>
+                  <a:schemeClr val="tx1"/>
+                </a:solidFill>
+                <a:effectLst/>
+                <a:latin typeface="+mn-lt"/>
+                <a:ea typeface="+mn-ea"/>
+                <a:cs typeface="+mn-cs"/>
+              </a:rPr>
+              <a:t> AVC (point E, height F) — so </a:t>
+            </a:r>
+            <a:r>
+              <a:rPr lang="en-US" sz="936" b="1" i="0" kern="1200" dirty="0">
+                <a:solidFill>
+                  <a:schemeClr val="tx1"/>
+                </a:solidFill>
+                <a:effectLst/>
+                <a:latin typeface="+mn-lt"/>
+                <a:ea typeface="+mn-ea"/>
+                <a:cs typeface="+mn-cs"/>
+              </a:rPr>
+              <a:t>P &gt; AVC</a:t>
+            </a:r>
+            <a:r>
+              <a:rPr lang="en-US" sz="936" b="0" i="0" kern="1200" dirty="0">
+                <a:solidFill>
+                  <a:schemeClr val="tx1"/>
+                </a:solidFill>
+                <a:effectLst/>
+                <a:latin typeface="+mn-lt"/>
+                <a:ea typeface="+mn-ea"/>
+                <a:cs typeface="+mn-cs"/>
+              </a:rPr>
+              <a:t>.</a:t>
+            </a:r>
+          </a:p>
+          <a:p>
+            <a:endParaRPr lang="en-US" dirty="0"/>
+          </a:p>
+        </p:txBody>
+      </p:sp>
+      <p:sp>
+        <p:nvSpPr>
+          <p:cNvPr id="4" name="Slide Number Placeholder 3"/>
+          <p:cNvSpPr>
+            <a:spLocks noGrp="1"/>
+          </p:cNvSpPr>
+          <p:nvPr>
+            <p:ph type="sldNum" sz="quarter" idx="5"/>
+          </p:nvPr>
+        </p:nvSpPr>
+        <p:spPr/>
+        <p:txBody>
+          <a:bodyPr/>
+          <a:lstStyle/>
+          <a:p>
+            <a:fld id="{BA7E51CF-144B-7241-A1FB-D978B63A9AA3}" type="slidenum">
+              <a:rPr lang="nb-NO" smtClean="0"/>
+              <a:t>50</a:t>
+            </a:fld>
+            <a:endParaRPr lang="nb-NO" dirty="0"/>
+          </a:p>
+        </p:txBody>
+      </p:sp>
+    </p:spTree>
+    <p:extLst>
+      <p:ext uri="{BB962C8B-B14F-4D97-AF65-F5344CB8AC3E}">
+        <p14:creationId xmlns:p14="http://schemas.microsoft.com/office/powerpoint/2010/main" val="2105311152"/>
       </p:ext>
     </p:extLst>
   </p:cSld>
@@ -21283,10 +21643,7 @@
                 </a:pPr>
                 <a14:m>
                   <m:oMathPara xmlns:m="http://schemas.openxmlformats.org/officeDocument/2006/math">
-                    <m:oMathParaPr>
-                      <m:jc m:val="centerGroup"/>
-                    </m:oMathParaPr>
-                    <m:oMath xmlns:m="http://schemas.openxmlformats.org/officeDocument/2006/math">
+                    <m:oMath>
                       <m:r>
                         <a:rPr lang="nb-NO" i="1">
                           <a:latin typeface="Cambria Math" panose="02040503050406030204" pitchFamily="18" charset="0"/>
@@ -21302,7 +21659,7 @@
                       <m:f>
                         <m:fPr>
                           <m:ctrlPr>
-                            <a:rPr lang="nb-NO" i="1">
+                            <a:rPr lang="nb-NO">
                               <a:latin typeface="Cambria Math" panose="02040503050406030204" pitchFamily="18" charset="0"/>
                             </a:rPr>
                           </m:ctrlPr>
@@ -21357,7 +21714,7 @@
                       <m:f>
                         <m:fPr>
                           <m:ctrlPr>
-                            <a:rPr lang="nb-NO" i="1">
+                            <a:rPr lang="nb-NO">
                               <a:latin typeface="Cambria Math" panose="02040503050406030204" pitchFamily="18" charset="0"/>
                             </a:rPr>
                           </m:ctrlPr>
@@ -21406,7 +21763,7 @@
                       <m:f>
                         <m:fPr>
                           <m:ctrlPr>
-                            <a:rPr lang="nb-NO" i="1">
+                            <a:rPr lang="nb-NO" b="0" i="1" smtClean="0">
                               <a:latin typeface="Cambria Math" panose="02040503050406030204" pitchFamily="18" charset="0"/>
                             </a:rPr>
                           </m:ctrlPr>
@@ -21520,7 +21877,7 @@
                     <m:sSub>
                       <m:sSubPr>
                         <m:ctrlPr>
-                          <a:rPr lang="nb-NO" i="1" smtClean="0">
+                          <a:rPr lang="nb-NO" i="1">
                             <a:latin typeface="Cambria Math" panose="02040503050406030204" pitchFamily="18" charset="0"/>
                           </a:rPr>
                         </m:ctrlPr>
@@ -21600,7 +21957,7 @@
                     <m:sSub>
                       <m:sSubPr>
                         <m:ctrlPr>
-                          <a:rPr lang="nb-NO" i="1" smtClean="0">
+                          <a:rPr lang="nb-NO" i="1">
                             <a:latin typeface="Cambria Math" panose="02040503050406030204" pitchFamily="18" charset="0"/>
                           </a:rPr>
                         </m:ctrlPr>
@@ -22122,7 +22479,7 @@
                     <m:sSup>
                       <m:sSupPr>
                         <m:ctrlPr>
-                          <a:rPr lang="nb-NO" b="0" i="1" smtClean="0">
+                          <a:rPr lang="nb-NO" b="0" i="0" smtClean="0">
                             <a:latin typeface="Cambria Math" panose="02040503050406030204" pitchFamily="18" charset="0"/>
                           </a:rPr>
                         </m:ctrlPr>
@@ -22269,7 +22626,7 @@
                         <m:limLow>
                           <m:limLowPr>
                             <m:ctrlPr>
-                              <a:rPr lang="nb-NO" b="0" i="1" smtClean="0">
+                              <a:rPr lang="nb-NO" b="0" i="0" smtClean="0">
                                 <a:latin typeface="Cambria Math" panose="02040503050406030204" pitchFamily="18" charset="0"/>
                               </a:rPr>
                             </m:ctrlPr>
@@ -22339,7 +22696,7 @@
                     <m:func>
                       <m:funcPr>
                         <m:ctrlPr>
-                          <a:rPr lang="nb-NO" i="1">
+                          <a:rPr lang="nb-NO" b="0" i="1" smtClean="0">
                             <a:latin typeface="Cambria Math" panose="02040503050406030204" pitchFamily="18" charset="0"/>
                           </a:rPr>
                         </m:ctrlPr>
@@ -22360,7 +22717,7 @@
                         <m:limLow>
                           <m:limLowPr>
                             <m:ctrlPr>
-                              <a:rPr lang="nb-NO" i="1">
+                              <a:rPr lang="nb-NO">
                                 <a:latin typeface="Cambria Math" panose="02040503050406030204" pitchFamily="18" charset="0"/>
                               </a:rPr>
                             </m:ctrlPr>
@@ -22458,7 +22815,7 @@
                         <m:sSup>
                           <m:sSupPr>
                             <m:ctrlPr>
-                              <a:rPr lang="nb-NO" i="1">
+                              <a:rPr lang="nb-NO">
                                 <a:latin typeface="Cambria Math" panose="02040503050406030204" pitchFamily="18" charset="0"/>
                               </a:rPr>
                             </m:ctrlPr>
@@ -24150,7 +24507,7 @@
           </p:nvPr>
         </p:nvPicPr>
         <p:blipFill>
-          <a:blip r:embed="rId2"/>
+          <a:blip r:embed="rId3"/>
           <a:stretch>
             <a:fillRect/>
           </a:stretch>
@@ -24939,10 +25296,7 @@
                 </a:pPr>
                 <a14:m>
                   <m:oMathPara xmlns:m="http://schemas.openxmlformats.org/officeDocument/2006/math">
-                    <m:oMathParaPr>
-                      <m:jc m:val="centerGroup"/>
-                    </m:oMathParaPr>
-                    <m:oMath xmlns:m="http://schemas.openxmlformats.org/officeDocument/2006/math">
+                    <m:oMath>
                       <m:sSub>
                         <m:sSubPr>
                           <m:ctrlPr>
@@ -25432,7 +25786,15 @@
             </a:r>
             <a:r>
               <a:rPr lang="en-US" sz="1600" dirty="0"/>
-              <a:t>is the point where the smallest   quantity of good is produced in the long run</a:t>
+              <a:t>is the point where the </a:t>
+            </a:r>
+            <a:r>
+              <a:rPr lang="en-US" sz="1600"/>
+              <a:t>smallest quantity </a:t>
+            </a:r>
+            <a:r>
+              <a:rPr lang="en-US" sz="1600" dirty="0"/>
+              <a:t>of good is produced in the long run</a:t>
             </a:r>
           </a:p>
         </p:txBody>
@@ -27896,21 +28258,6 @@
 </file>
 
 <file path=customXml/item1.xml><?xml version="1.0" encoding="utf-8"?>
-<?mso-contentType ?>
-<FormTemplates xmlns="http://schemas.microsoft.com/sharepoint/v3/contenttype/forms">
-  <Display>DocumentLibraryForm</Display>
-  <Edit>DocumentLibraryForm</Edit>
-  <New>DocumentLibraryForm</New>
-</FormTemplates>
-</file>
-
-<file path=customXml/item2.xml><?xml version="1.0" encoding="utf-8"?>
-<p:properties xmlns:p="http://schemas.microsoft.com/office/2006/metadata/properties" xmlns:xsi="http://www.w3.org/2001/XMLSchema-instance" xmlns:pc="http://schemas.microsoft.com/office/infopath/2007/PartnerControls">
-  <documentManagement/>
-</p:properties>
-</file>
-
-<file path=customXml/item3.xml><?xml version="1.0" encoding="utf-8"?>
 <ct:contentTypeSchema xmlns:ct="http://schemas.microsoft.com/office/2006/metadata/contentType" xmlns:ma="http://schemas.microsoft.com/office/2006/metadata/properties/metaAttributes" ct:_="" ma:_="" ma:contentTypeName="Dokument" ma:contentTypeID="0x010100086B82B2E673BB48BBFD907EF88B1F72" ma:contentTypeVersion="0" ma:contentTypeDescription="Opprett et nytt dokument." ma:contentTypeScope="" ma:versionID="0653049da3c7d6103ba0b9e54f21c3f6">
   <xsd:schema xmlns:xsd="http://www.w3.org/2001/XMLSchema" xmlns:xs="http://www.w3.org/2001/XMLSchema" xmlns:p="http://schemas.microsoft.com/office/2006/metadata/properties" targetNamespace="http://schemas.microsoft.com/office/2006/metadata/properties" ma:root="true" ma:fieldsID="3e2500873ed525c1cf306a41cba81ed5">
     <xsd:element name="properties">
@@ -28024,30 +28371,22 @@
 </ct:contentTypeSchema>
 </file>
 
-<file path=customXml/itemProps1.xml><?xml version="1.0" encoding="utf-8"?>
-<ds:datastoreItem xmlns:ds="http://schemas.openxmlformats.org/officeDocument/2006/customXml" ds:itemID="{27479CE2-CFF2-495B-B6E0-2F66375CDBBB}">
-  <ds:schemaRefs>
-    <ds:schemaRef ds:uri="http://schemas.microsoft.com/sharepoint/v3/contenttype/forms"/>
-  </ds:schemaRefs>
-</ds:datastoreItem>
+<file path=customXml/item2.xml><?xml version="1.0" encoding="utf-8"?>
+<?mso-contentType ?>
+<FormTemplates xmlns="http://schemas.microsoft.com/sharepoint/v3/contenttype/forms">
+  <Display>DocumentLibraryForm</Display>
+  <Edit>DocumentLibraryForm</Edit>
+  <New>DocumentLibraryForm</New>
+</FormTemplates>
 </file>
 
-<file path=customXml/itemProps2.xml><?xml version="1.0" encoding="utf-8"?>
-<ds:datastoreItem xmlns:ds="http://schemas.openxmlformats.org/officeDocument/2006/customXml" ds:itemID="{3CAC7484-FE6E-40E6-83CA-83D55D847BA8}">
-  <ds:schemaRefs>
-    <ds:schemaRef ds:uri="http://schemas.microsoft.com/office/2006/documentManagement/types"/>
-    <ds:schemaRef ds:uri="http://schemas.microsoft.com/office/2006/metadata/properties"/>
-    <ds:schemaRef ds:uri="http://schemas.microsoft.com/office/infopath/2007/PartnerControls"/>
-    <ds:schemaRef ds:uri="http://schemas.openxmlformats.org/package/2006/metadata/core-properties"/>
-    <ds:schemaRef ds:uri="http://purl.org/dc/dcmitype/"/>
-    <ds:schemaRef ds:uri="http://purl.org/dc/terms/"/>
-    <ds:schemaRef ds:uri="http://www.w3.org/XML/1998/namespace"/>
-    <ds:schemaRef ds:uri="http://purl.org/dc/elements/1.1/"/>
-  </ds:schemaRefs>
-</ds:datastoreItem>
+<file path=customXml/item3.xml><?xml version="1.0" encoding="utf-8"?>
+<p:properties xmlns:p="http://schemas.microsoft.com/office/2006/metadata/properties" xmlns:xsi="http://www.w3.org/2001/XMLSchema-instance" xmlns:pc="http://schemas.microsoft.com/office/infopath/2007/PartnerControls">
+  <documentManagement/>
+</p:properties>
 </file>
 
-<file path=customXml/itemProps3.xml><?xml version="1.0" encoding="utf-8"?>
+<file path=customXml/itemProps1.xml><?xml version="1.0" encoding="utf-8"?>
 <ds:datastoreItem xmlns:ds="http://schemas.openxmlformats.org/officeDocument/2006/customXml" ds:itemID="{C299F0B8-F1FA-4547-8345-D1C345C8ADDE}">
   <ds:schemaRefs>
     <ds:schemaRef ds:uri="http://schemas.microsoft.com/office/2006/metadata/contentType"/>
@@ -28061,4 +28400,27 @@
     <ds:schemaRef ds:uri="http://schemas.microsoft.com/office/infopath/2007/PartnerControls"/>
   </ds:schemaRefs>
 </ds:datastoreItem>
+</file>
+
+<file path=customXml/itemProps2.xml><?xml version="1.0" encoding="utf-8"?>
+<ds:datastoreItem xmlns:ds="http://schemas.openxmlformats.org/officeDocument/2006/customXml" ds:itemID="{27479CE2-CFF2-495B-B6E0-2F66375CDBBB}">
+  <ds:schemaRefs>
+    <ds:schemaRef ds:uri="http://schemas.microsoft.com/sharepoint/v3/contenttype/forms"/>
+  </ds:schemaRefs>
+</ds:datastoreItem>
+</file>
+
+<file path=customXml/itemProps3.xml><?xml version="1.0" encoding="utf-8"?>
+<ds:datastoreItem xmlns:ds="http://schemas.openxmlformats.org/officeDocument/2006/customXml" ds:itemID="{3CAC7484-FE6E-40E6-83CA-83D55D847BA8}">
+  <ds:schemaRefs>
+    <ds:schemaRef ds:uri="http://schemas.microsoft.com/office/2006/documentManagement/types"/>
+    <ds:schemaRef ds:uri="http://schemas.microsoft.com/office/2006/metadata/properties"/>
+    <ds:schemaRef ds:uri="http://schemas.microsoft.com/office/infopath/2007/PartnerControls"/>
+    <ds:schemaRef ds:uri="http://schemas.openxmlformats.org/package/2006/metadata/core-properties"/>
+    <ds:schemaRef ds:uri="http://purl.org/dc/dcmitype/"/>
+    <ds:schemaRef ds:uri="http://purl.org/dc/terms/"/>
+    <ds:schemaRef ds:uri="http://www.w3.org/XML/1998/namespace"/>
+    <ds:schemaRef ds:uri="http://purl.org/dc/elements/1.1/"/>
+  </ds:schemaRefs>
+</ds:datastoreItem>
 </file>